--- a/prezentacie/c02w.pptx
+++ b/prezentacie/c02w.pptx
@@ -7,14 +7,15 @@
   <p:sldIdLst>
     <p:sldId id="266" r:id="rId2"/>
     <p:sldId id="257" r:id="rId3"/>
-    <p:sldId id="269" r:id="rId4"/>
-    <p:sldId id="274" r:id="rId5"/>
+    <p:sldId id="274" r:id="rId4"/>
+    <p:sldId id="269" r:id="rId5"/>
     <p:sldId id="275" r:id="rId6"/>
     <p:sldId id="276" r:id="rId7"/>
-    <p:sldId id="277" r:id="rId8"/>
-    <p:sldId id="278" r:id="rId9"/>
-    <p:sldId id="279" r:id="rId10"/>
-    <p:sldId id="280" r:id="rId11"/>
+    <p:sldId id="281" r:id="rId8"/>
+    <p:sldId id="277" r:id="rId9"/>
+    <p:sldId id="278" r:id="rId10"/>
+    <p:sldId id="279" r:id="rId11"/>
+    <p:sldId id="280" r:id="rId12"/>
   </p:sldIdLst>
   <p:sldSz cx="12192000" cy="6858000"/>
   <p:notesSz cx="6858000" cy="9144000"/>
@@ -252,7 +253,7 @@
           <a:p>
             <a:fld id="{10052495-8BC8-4CFB-94B1-B0429F101A0D}" type="datetimeFigureOut">
               <a:rPr lang="sk-SK" smtClean="0"/>
-              <a:t>23. 9. 2025</a:t>
+              <a:t>8. 9. 2026</a:t>
             </a:fld>
             <a:endParaRPr lang="sk-SK"/>
           </a:p>
@@ -422,7 +423,7 @@
           <a:p>
             <a:fld id="{10052495-8BC8-4CFB-94B1-B0429F101A0D}" type="datetimeFigureOut">
               <a:rPr lang="sk-SK" smtClean="0"/>
-              <a:t>23. 9. 2025</a:t>
+              <a:t>8. 9. 2026</a:t>
             </a:fld>
             <a:endParaRPr lang="sk-SK"/>
           </a:p>
@@ -602,7 +603,7 @@
           <a:p>
             <a:fld id="{10052495-8BC8-4CFB-94B1-B0429F101A0D}" type="datetimeFigureOut">
               <a:rPr lang="sk-SK" smtClean="0"/>
-              <a:t>23. 9. 2025</a:t>
+              <a:t>8. 9. 2026</a:t>
             </a:fld>
             <a:endParaRPr lang="sk-SK"/>
           </a:p>
@@ -772,7 +773,7 @@
           <a:p>
             <a:fld id="{10052495-8BC8-4CFB-94B1-B0429F101A0D}" type="datetimeFigureOut">
               <a:rPr lang="sk-SK" smtClean="0"/>
-              <a:t>23. 9. 2025</a:t>
+              <a:t>8. 9. 2026</a:t>
             </a:fld>
             <a:endParaRPr lang="sk-SK"/>
           </a:p>
@@ -1018,7 +1019,7 @@
           <a:p>
             <a:fld id="{10052495-8BC8-4CFB-94B1-B0429F101A0D}" type="datetimeFigureOut">
               <a:rPr lang="sk-SK" smtClean="0"/>
-              <a:t>23. 9. 2025</a:t>
+              <a:t>8. 9. 2026</a:t>
             </a:fld>
             <a:endParaRPr lang="sk-SK"/>
           </a:p>
@@ -1250,7 +1251,7 @@
           <a:p>
             <a:fld id="{10052495-8BC8-4CFB-94B1-B0429F101A0D}" type="datetimeFigureOut">
               <a:rPr lang="sk-SK" smtClean="0"/>
-              <a:t>23. 9. 2025</a:t>
+              <a:t>8. 9. 2026</a:t>
             </a:fld>
             <a:endParaRPr lang="sk-SK"/>
           </a:p>
@@ -1617,7 +1618,7 @@
           <a:p>
             <a:fld id="{10052495-8BC8-4CFB-94B1-B0429F101A0D}" type="datetimeFigureOut">
               <a:rPr lang="sk-SK" smtClean="0"/>
-              <a:t>23. 9. 2025</a:t>
+              <a:t>8. 9. 2026</a:t>
             </a:fld>
             <a:endParaRPr lang="sk-SK"/>
           </a:p>
@@ -1735,7 +1736,7 @@
           <a:p>
             <a:fld id="{10052495-8BC8-4CFB-94B1-B0429F101A0D}" type="datetimeFigureOut">
               <a:rPr lang="sk-SK" smtClean="0"/>
-              <a:t>23. 9. 2025</a:t>
+              <a:t>8. 9. 2026</a:t>
             </a:fld>
             <a:endParaRPr lang="sk-SK"/>
           </a:p>
@@ -1830,7 +1831,7 @@
           <a:p>
             <a:fld id="{10052495-8BC8-4CFB-94B1-B0429F101A0D}" type="datetimeFigureOut">
               <a:rPr lang="sk-SK" smtClean="0"/>
-              <a:t>23. 9. 2025</a:t>
+              <a:t>8. 9. 2026</a:t>
             </a:fld>
             <a:endParaRPr lang="sk-SK"/>
           </a:p>
@@ -2107,7 +2108,7 @@
           <a:p>
             <a:fld id="{10052495-8BC8-4CFB-94B1-B0429F101A0D}" type="datetimeFigureOut">
               <a:rPr lang="sk-SK" smtClean="0"/>
-              <a:t>23. 9. 2025</a:t>
+              <a:t>8. 9. 2026</a:t>
             </a:fld>
             <a:endParaRPr lang="sk-SK"/>
           </a:p>
@@ -2364,7 +2365,7 @@
           <a:p>
             <a:fld id="{10052495-8BC8-4CFB-94B1-B0429F101A0D}" type="datetimeFigureOut">
               <a:rPr lang="sk-SK" smtClean="0"/>
-              <a:t>23. 9. 2025</a:t>
+              <a:t>8. 9. 2026</a:t>
             </a:fld>
             <a:endParaRPr lang="sk-SK"/>
           </a:p>
@@ -2577,7 +2578,7 @@
           <a:p>
             <a:fld id="{10052495-8BC8-4CFB-94B1-B0429F101A0D}" type="datetimeFigureOut">
               <a:rPr lang="sk-SK" smtClean="0"/>
-              <a:t>23. 9. 2025</a:t>
+              <a:t>8. 9. 2026</a:t>
             </a:fld>
             <a:endParaRPr lang="sk-SK"/>
           </a:p>
@@ -3504,7 +3505,15 @@
             </a:br>
             <a:r>
               <a:rPr lang="sk-SK" b="1" dirty="0"/>
-              <a:t>Ing. Jozef Wagner PhD.</a:t>
+              <a:t>Ing. Jozef Wagner</a:t>
+            </a:r>
+            <a:r>
+              <a:rPr lang="en-US" b="1" dirty="0"/>
+              <a:t>,</a:t>
+            </a:r>
+            <a:r>
+              <a:rPr lang="sk-SK" b="1" dirty="0"/>
+              <a:t> PhD.</a:t>
             </a:r>
           </a:p>
           <a:p>
@@ -3557,6 +3566,288 @@
 </file>
 
 <file path=ppt/slides/slide10.xml><?xml version="1.0" encoding="utf-8"?>
+<p:sld xmlns:a="http://schemas.openxmlformats.org/drawingml/2006/main" xmlns:r="http://schemas.openxmlformats.org/officeDocument/2006/relationships" xmlns:p="http://schemas.openxmlformats.org/presentationml/2006/main">
+  <p:cSld>
+    <p:bg>
+      <p:bgPr>
+        <a:solidFill>
+          <a:schemeClr val="bg1"/>
+        </a:solidFill>
+        <a:effectLst/>
+      </p:bgPr>
+    </p:bg>
+    <p:spTree>
+      <p:nvGrpSpPr>
+        <p:cNvPr id="1" name="">
+          <a:extLst>
+            <a:ext uri="{FF2B5EF4-FFF2-40B4-BE49-F238E27FC236}">
+              <a16:creationId xmlns:a16="http://schemas.microsoft.com/office/drawing/2014/main" id="{14C3C45A-404A-F8E1-90CA-F992F3FFD7A2}"/>
+            </a:ext>
+          </a:extLst>
+        </p:cNvPr>
+        <p:cNvGrpSpPr/>
+        <p:nvPr/>
+      </p:nvGrpSpPr>
+      <p:grpSpPr>
+        <a:xfrm>
+          <a:off x="0" y="0"/>
+          <a:ext cx="0" cy="0"/>
+          <a:chOff x="0" y="0"/>
+          <a:chExt cx="0" cy="0"/>
+        </a:xfrm>
+      </p:grpSpPr>
+      <p:sp>
+        <p:nvSpPr>
+          <p:cNvPr id="3" name="Zástupný objekt pre obsah 2">
+            <a:extLst>
+              <a:ext uri="{FF2B5EF4-FFF2-40B4-BE49-F238E27FC236}">
+                <a16:creationId xmlns:a16="http://schemas.microsoft.com/office/drawing/2014/main" id="{03CB0AB9-7055-65C9-8673-2397DE68E9A3}"/>
+              </a:ext>
+            </a:extLst>
+          </p:cNvPr>
+          <p:cNvSpPr>
+            <a:spLocks noGrp="1"/>
+          </p:cNvSpPr>
+          <p:nvPr>
+            <p:ph idx="1"/>
+          </p:nvPr>
+        </p:nvSpPr>
+        <p:spPr>
+          <a:xfrm>
+            <a:off x="1502228" y="1573591"/>
+            <a:ext cx="9851572" cy="4217609"/>
+          </a:xfrm>
+        </p:spPr>
+        <p:txBody>
+          <a:bodyPr>
+            <a:noAutofit/>
+          </a:bodyPr>
+          <a:lstStyle/>
+          <a:p>
+            <a:pPr marL="0" indent="0">
+              <a:spcBef>
+                <a:spcPts val="1200"/>
+              </a:spcBef>
+              <a:buNone/>
+            </a:pPr>
+            <a:r>
+              <a:rPr lang="sk-SK" dirty="0"/>
+              <a:t>Cyklus </a:t>
+            </a:r>
+            <a:r>
+              <a:rPr lang="sk-SK" dirty="0" err="1">
+                <a:highlight>
+                  <a:srgbClr val="FFFF00"/>
+                </a:highlight>
+                <a:latin typeface="Consolas" panose="020B0609020204030204" pitchFamily="49" charset="0"/>
+              </a:rPr>
+              <a:t>for</a:t>
+            </a:r>
+            <a:r>
+              <a:rPr lang="sk-SK" dirty="0"/>
+              <a:t> sa používa, keď dopredu vieme, koľkokrát sa má cyklus opakovať</a:t>
+            </a:r>
+          </a:p>
+          <a:p>
+            <a:pPr marL="0" indent="0">
+              <a:spcBef>
+                <a:spcPts val="1200"/>
+              </a:spcBef>
+              <a:buNone/>
+            </a:pPr>
+            <a:endParaRPr lang="en-US" dirty="0"/>
+          </a:p>
+          <a:p>
+            <a:pPr marL="0" indent="0">
+              <a:spcBef>
+                <a:spcPts val="0"/>
+              </a:spcBef>
+              <a:buNone/>
+            </a:pPr>
+            <a:r>
+              <a:rPr lang="sk-SK" dirty="0" err="1">
+                <a:solidFill>
+                  <a:srgbClr val="C00000"/>
+                </a:solidFill>
+                <a:highlight>
+                  <a:srgbClr val="FFFF00"/>
+                </a:highlight>
+                <a:latin typeface="Consolas" panose="020B0609020204030204" pitchFamily="49" charset="0"/>
+              </a:rPr>
+              <a:t>for</a:t>
+            </a:r>
+            <a:r>
+              <a:rPr lang="sk-SK" dirty="0">
+                <a:solidFill>
+                  <a:srgbClr val="C00000"/>
+                </a:solidFill>
+                <a:highlight>
+                  <a:srgbClr val="FFFF00"/>
+                </a:highlight>
+                <a:latin typeface="Consolas" panose="020B0609020204030204" pitchFamily="49" charset="0"/>
+              </a:rPr>
+              <a:t> (inicializácia; podmienka; aktualizácia) {</a:t>
+            </a:r>
+          </a:p>
+          <a:p>
+            <a:pPr marL="0" indent="0">
+              <a:spcBef>
+                <a:spcPts val="0"/>
+              </a:spcBef>
+              <a:buNone/>
+            </a:pPr>
+            <a:r>
+              <a:rPr lang="sk-SK" dirty="0">
+                <a:solidFill>
+                  <a:srgbClr val="C00000"/>
+                </a:solidFill>
+                <a:highlight>
+                  <a:srgbClr val="FFFF00"/>
+                </a:highlight>
+                <a:latin typeface="Consolas" panose="020B0609020204030204" pitchFamily="49" charset="0"/>
+              </a:rPr>
+              <a:t>    // telo cyklu - kód, ktorý sa opakuje</a:t>
+            </a:r>
+          </a:p>
+          <a:p>
+            <a:pPr marL="0" indent="0">
+              <a:spcBef>
+                <a:spcPts val="0"/>
+              </a:spcBef>
+              <a:buNone/>
+            </a:pPr>
+            <a:r>
+              <a:rPr lang="sk-SK" dirty="0">
+                <a:solidFill>
+                  <a:srgbClr val="C00000"/>
+                </a:solidFill>
+                <a:highlight>
+                  <a:srgbClr val="FFFF00"/>
+                </a:highlight>
+                <a:latin typeface="Consolas" panose="020B0609020204030204" pitchFamily="49" charset="0"/>
+              </a:rPr>
+              <a:t>}</a:t>
+            </a:r>
+            <a:endParaRPr lang="en-US" dirty="0">
+              <a:solidFill>
+                <a:srgbClr val="C00000"/>
+              </a:solidFill>
+              <a:highlight>
+                <a:srgbClr val="FFFF00"/>
+              </a:highlight>
+              <a:latin typeface="Consolas" panose="020B0609020204030204" pitchFamily="49" charset="0"/>
+            </a:endParaRPr>
+          </a:p>
+          <a:p>
+            <a:pPr marL="0" indent="0">
+              <a:spcBef>
+                <a:spcPts val="1200"/>
+              </a:spcBef>
+              <a:buNone/>
+            </a:pPr>
+            <a:endParaRPr lang="sk-SK" dirty="0"/>
+          </a:p>
+          <a:p>
+            <a:pPr marL="0" indent="0">
+              <a:spcBef>
+                <a:spcPts val="0"/>
+              </a:spcBef>
+              <a:buNone/>
+            </a:pPr>
+            <a:r>
+              <a:rPr lang="nn-NO" dirty="0">
+                <a:highlight>
+                  <a:srgbClr val="FFFF00"/>
+                </a:highlight>
+                <a:latin typeface="Consolas" panose="020B0609020204030204" pitchFamily="49" charset="0"/>
+              </a:rPr>
+              <a:t>for (int i = 0; i &lt; 5; i++) {</a:t>
+            </a:r>
+          </a:p>
+          <a:p>
+            <a:pPr marL="0" indent="0">
+              <a:spcBef>
+                <a:spcPts val="0"/>
+              </a:spcBef>
+              <a:buNone/>
+            </a:pPr>
+            <a:r>
+              <a:rPr lang="nn-NO" dirty="0">
+                <a:highlight>
+                  <a:srgbClr val="FFFF00"/>
+                </a:highlight>
+                <a:latin typeface="Consolas" panose="020B0609020204030204" pitchFamily="49" charset="0"/>
+              </a:rPr>
+              <a:t>    System.out.println("i = " + i);</a:t>
+            </a:r>
+          </a:p>
+          <a:p>
+            <a:pPr marL="0" indent="0">
+              <a:spcBef>
+                <a:spcPts val="0"/>
+              </a:spcBef>
+              <a:buNone/>
+            </a:pPr>
+            <a:r>
+              <a:rPr lang="nn-NO" dirty="0">
+                <a:highlight>
+                  <a:srgbClr val="FFFF00"/>
+                </a:highlight>
+                <a:latin typeface="Consolas" panose="020B0609020204030204" pitchFamily="49" charset="0"/>
+              </a:rPr>
+              <a:t>}</a:t>
+            </a:r>
+            <a:endParaRPr lang="sk-SK" dirty="0">
+              <a:highlight>
+                <a:srgbClr val="FFFF00"/>
+              </a:highlight>
+              <a:latin typeface="Consolas" panose="020B0609020204030204" pitchFamily="49" charset="0"/>
+            </a:endParaRPr>
+          </a:p>
+        </p:txBody>
+      </p:sp>
+      <p:sp>
+        <p:nvSpPr>
+          <p:cNvPr id="5" name="Nadpis 4">
+            <a:extLst>
+              <a:ext uri="{FF2B5EF4-FFF2-40B4-BE49-F238E27FC236}">
+                <a16:creationId xmlns:a16="http://schemas.microsoft.com/office/drawing/2014/main" id="{F1344CA6-2CA1-9017-D393-77EAA0BEB0F2}"/>
+              </a:ext>
+            </a:extLst>
+          </p:cNvPr>
+          <p:cNvSpPr>
+            <a:spLocks noGrp="1"/>
+          </p:cNvSpPr>
+          <p:nvPr>
+            <p:ph type="title"/>
+          </p:nvPr>
+        </p:nvSpPr>
+        <p:spPr/>
+        <p:txBody>
+          <a:bodyPr/>
+          <a:lstStyle/>
+          <a:p>
+            <a:r>
+              <a:rPr lang="sk-SK" dirty="0"/>
+              <a:t>Cyklus</a:t>
+            </a:r>
+          </a:p>
+        </p:txBody>
+      </p:sp>
+    </p:spTree>
+    <p:extLst>
+      <p:ext uri="{BB962C8B-B14F-4D97-AF65-F5344CB8AC3E}">
+        <p14:creationId xmlns:p14="http://schemas.microsoft.com/office/powerpoint/2010/main" val="3150143659"/>
+      </p:ext>
+    </p:extLst>
+  </p:cSld>
+  <p:clrMapOvr>
+    <a:masterClrMapping/>
+  </p:clrMapOvr>
+</p:sld>
+</file>
+
+<file path=ppt/slides/slide11.xml><?xml version="1.0" encoding="utf-8"?>
 <p:sld xmlns:a="http://schemas.openxmlformats.org/drawingml/2006/main" xmlns:r="http://schemas.openxmlformats.org/officeDocument/2006/relationships" xmlns:p="http://schemas.openxmlformats.org/presentationml/2006/main">
   <p:cSld>
     <p:bg>
@@ -4422,7 +4713,7 @@
         <p:cNvPr id="1" name="">
           <a:extLst>
             <a:ext uri="{FF2B5EF4-FFF2-40B4-BE49-F238E27FC236}">
-              <a16:creationId xmlns:a16="http://schemas.microsoft.com/office/drawing/2014/main" id="{F85B952C-DEB0-F05A-6099-A8BDC351D532}"/>
+              <a16:creationId xmlns:a16="http://schemas.microsoft.com/office/drawing/2014/main" id="{4E9B7D7F-1465-F4D8-A5AA-8AE0E173294B}"/>
             </a:ext>
           </a:extLst>
         </p:cNvPr>
@@ -4442,7 +4733,7 @@
           <p:cNvPr id="3" name="Zástupný objekt pre obsah 2">
             <a:extLst>
               <a:ext uri="{FF2B5EF4-FFF2-40B4-BE49-F238E27FC236}">
-                <a16:creationId xmlns:a16="http://schemas.microsoft.com/office/drawing/2014/main" id="{EA1B4840-2877-41AB-3F4C-3F6D130D5034}"/>
+                <a16:creationId xmlns:a16="http://schemas.microsoft.com/office/drawing/2014/main" id="{7AFA8CAF-912F-42AE-4E85-2A7A0F2B6997}"/>
               </a:ext>
             </a:extLst>
           </p:cNvPr>
@@ -4455,8 +4746,8 @@
         </p:nvSpPr>
         <p:spPr>
           <a:xfrm>
-            <a:off x="2068287" y="1845734"/>
-            <a:ext cx="8066314" cy="4217609"/>
+            <a:off x="2068286" y="1845734"/>
+            <a:ext cx="9437913" cy="4217609"/>
           </a:xfrm>
         </p:spPr>
         <p:txBody>
@@ -4472,60 +4763,21 @@
               <a:buNone/>
             </a:pPr>
             <a:r>
-              <a:rPr lang="sk-SK" sz="2800" dirty="0"/>
-              <a:t>Funkcie v Jave sú vnútri tried a nazývajú sa metódy.</a:t>
-            </a:r>
-          </a:p>
-          <a:p>
-            <a:pPr marL="0" indent="0">
-              <a:spcBef>
-                <a:spcPts val="1200"/>
-              </a:spcBef>
-              <a:buNone/>
-            </a:pPr>
-            <a:r>
-              <a:rPr lang="sk-SK" dirty="0"/>
-              <a:t>Trieda je šablóna, alebo plán, podľa ktorého sa vytvárajú objekty. </a:t>
-            </a:r>
-          </a:p>
-          <a:p>
-            <a:pPr marL="0" indent="0">
-              <a:spcBef>
-                <a:spcPts val="1200"/>
-              </a:spcBef>
-              <a:buNone/>
-            </a:pPr>
-            <a:r>
-              <a:rPr lang="fr-FR" sz="2800" dirty="0" err="1"/>
-              <a:t>Statické</a:t>
-            </a:r>
-            <a:r>
-              <a:rPr lang="fr-FR" sz="2800" dirty="0"/>
-              <a:t> </a:t>
-            </a:r>
-            <a:r>
-              <a:rPr lang="fr-FR" sz="2800" dirty="0" err="1"/>
-              <a:t>metódy</a:t>
-            </a:r>
-            <a:r>
-              <a:rPr lang="fr-FR" sz="2800" dirty="0"/>
-              <a:t> - </a:t>
-            </a:r>
-            <a:r>
-              <a:rPr lang="fr-FR" dirty="0" err="1">
-                <a:highlight>
-                  <a:srgbClr val="FFFF00"/>
-                </a:highlight>
-                <a:latin typeface="Consolas" panose="020B0609020204030204" pitchFamily="49" charset="0"/>
-              </a:rPr>
-              <a:t>static</a:t>
-            </a:r>
-            <a:endParaRPr lang="fr-FR" dirty="0">
-              <a:highlight>
-                <a:srgbClr val="FFFF00"/>
-              </a:highlight>
-              <a:latin typeface="Consolas" panose="020B0609020204030204" pitchFamily="49" charset="0"/>
-            </a:endParaRPr>
+              <a:rPr lang="sk-SK" sz="2800" dirty="0" err="1">
+                <a:highlight>
+                  <a:srgbClr val="00FFFF"/>
+                </a:highlight>
+              </a:rPr>
+              <a:t>Entry</a:t>
+            </a:r>
+            <a:r>
+              <a:rPr lang="sk-SK" sz="2800" dirty="0">
+                <a:highlight>
+                  <a:srgbClr val="00FFFF"/>
+                </a:highlight>
+              </a:rPr>
+              <a:t> point programu</a:t>
+            </a:r>
           </a:p>
           <a:p>
             <a:pPr lvl="1">
@@ -4534,26 +4786,85 @@
               </a:spcBef>
             </a:pPr>
             <a:r>
-              <a:rPr lang="fr-FR" sz="2800" dirty="0" err="1"/>
-              <a:t>Patria</a:t>
-            </a:r>
-            <a:r>
-              <a:rPr lang="fr-FR" sz="2800" dirty="0"/>
-              <a:t> do </a:t>
-            </a:r>
-            <a:r>
-              <a:rPr lang="sk-SK" sz="2800" dirty="0"/>
-              <a:t>konkrétnej</a:t>
-            </a:r>
-            <a:r>
-              <a:rPr lang="fr-FR" sz="2800" dirty="0"/>
-              <a:t> </a:t>
-            </a:r>
-            <a:r>
-              <a:rPr lang="fr-FR" sz="2800" dirty="0" err="1"/>
-              <a:t>triedy</a:t>
-            </a:r>
-            <a:endParaRPr lang="fr-FR" sz="2800" dirty="0"/>
+              <a:rPr lang="sk-SK" sz="2800" dirty="0">
+                <a:highlight>
+                  <a:srgbClr val="00FFFF"/>
+                </a:highlight>
+              </a:rPr>
+              <a:t>statická metóda </a:t>
+            </a:r>
+            <a:r>
+              <a:rPr lang="sk-SK" sz="2800" dirty="0" err="1">
+                <a:solidFill>
+                  <a:srgbClr val="C00000"/>
+                </a:solidFill>
+                <a:highlight>
+                  <a:srgbClr val="FFFF00"/>
+                </a:highlight>
+                <a:latin typeface="Consolas" panose="020B0609020204030204" pitchFamily="49" charset="0"/>
+              </a:rPr>
+              <a:t>main</a:t>
+            </a:r>
+            <a:r>
+              <a:rPr lang="sk-SK" sz="2800" dirty="0">
+                <a:solidFill>
+                  <a:srgbClr val="C00000"/>
+                </a:solidFill>
+                <a:highlight>
+                  <a:srgbClr val="FFFF00"/>
+                </a:highlight>
+                <a:latin typeface="Consolas" panose="020B0609020204030204" pitchFamily="49" charset="0"/>
+              </a:rPr>
+              <a:t>(</a:t>
+            </a:r>
+            <a:r>
+              <a:rPr lang="sk-SK" sz="2800" dirty="0" err="1">
+                <a:solidFill>
+                  <a:srgbClr val="C00000"/>
+                </a:solidFill>
+                <a:highlight>
+                  <a:srgbClr val="FFFF00"/>
+                </a:highlight>
+                <a:latin typeface="Consolas" panose="020B0609020204030204" pitchFamily="49" charset="0"/>
+              </a:rPr>
+              <a:t>String</a:t>
+            </a:r>
+            <a:r>
+              <a:rPr lang="sk-SK" sz="2800" dirty="0">
+                <a:solidFill>
+                  <a:srgbClr val="C00000"/>
+                </a:solidFill>
+                <a:highlight>
+                  <a:srgbClr val="FFFF00"/>
+                </a:highlight>
+                <a:latin typeface="Consolas" panose="020B0609020204030204" pitchFamily="49" charset="0"/>
+              </a:rPr>
+              <a:t>[] </a:t>
+            </a:r>
+            <a:r>
+              <a:rPr lang="sk-SK" sz="2800" dirty="0" err="1">
+                <a:solidFill>
+                  <a:srgbClr val="C00000"/>
+                </a:solidFill>
+                <a:highlight>
+                  <a:srgbClr val="FFFF00"/>
+                </a:highlight>
+                <a:latin typeface="Consolas" panose="020B0609020204030204" pitchFamily="49" charset="0"/>
+              </a:rPr>
+              <a:t>args</a:t>
+            </a:r>
+            <a:r>
+              <a:rPr lang="sk-SK" sz="2800" dirty="0">
+                <a:solidFill>
+                  <a:srgbClr val="C00000"/>
+                </a:solidFill>
+                <a:highlight>
+                  <a:srgbClr val="FFFF00"/>
+                </a:highlight>
+                <a:latin typeface="Consolas" panose="020B0609020204030204" pitchFamily="49" charset="0"/>
+              </a:rPr>
+              <a:t>)</a:t>
+            </a:r>
           </a:p>
           <a:p>
             <a:pPr lvl="1">
@@ -4562,42 +4873,348 @@
               </a:spcBef>
             </a:pPr>
             <a:r>
-              <a:rPr lang="fr-FR" sz="2800" dirty="0" err="1"/>
-              <a:t>Viem</a:t>
-            </a:r>
-            <a:r>
-              <a:rPr lang="fr-FR" sz="2800" dirty="0"/>
+              <a:rPr lang="sk-SK" sz="2800" dirty="0">
+                <a:highlight>
+                  <a:srgbClr val="00FFFF"/>
+                </a:highlight>
+              </a:rPr>
+              <a:t>keď skončí </a:t>
+            </a:r>
+            <a:r>
+              <a:rPr lang="sk-SK" sz="2800" dirty="0" err="1">
+                <a:solidFill>
+                  <a:srgbClr val="C00000"/>
+                </a:solidFill>
+                <a:highlight>
+                  <a:srgbClr val="FFFF00"/>
+                </a:highlight>
+                <a:latin typeface="Consolas" panose="020B0609020204030204" pitchFamily="49" charset="0"/>
+              </a:rPr>
+              <a:t>main</a:t>
+            </a:r>
+            <a:r>
+              <a:rPr lang="sk-SK" sz="2800" dirty="0">
+                <a:highlight>
+                  <a:srgbClr val="00FFFF"/>
+                </a:highlight>
+              </a:rPr>
+              <a:t>, skončí sa aj program</a:t>
+            </a:r>
+          </a:p>
+          <a:p>
+            <a:pPr lvl="1">
+              <a:spcBef>
+                <a:spcPts val="1200"/>
+              </a:spcBef>
+            </a:pPr>
+            <a:endParaRPr lang="sk-SK" sz="2800" dirty="0"/>
+          </a:p>
+          <a:p>
+            <a:pPr marL="0" lvl="1" indent="0">
+              <a:lnSpc>
+                <a:spcPct val="100000"/>
+              </a:lnSpc>
+              <a:spcBef>
+                <a:spcPts val="0"/>
+              </a:spcBef>
+              <a:buNone/>
+            </a:pPr>
+            <a:r>
+              <a:rPr lang="sk-SK" sz="2800" dirty="0" err="1">
+                <a:highlight>
+                  <a:srgbClr val="FFFF00"/>
+                </a:highlight>
+                <a:latin typeface="Consolas" panose="020B0609020204030204" pitchFamily="49" charset="0"/>
+              </a:rPr>
+              <a:t>public</a:t>
+            </a:r>
+            <a:r>
+              <a:rPr lang="sk-SK" sz="2800" dirty="0">
+                <a:highlight>
+                  <a:srgbClr val="FFFF00"/>
+                </a:highlight>
+                <a:latin typeface="Consolas" panose="020B0609020204030204" pitchFamily="49" charset="0"/>
+              </a:rPr>
               <a:t> </a:t>
             </a:r>
             <a:r>
-              <a:rPr lang="fr-FR" sz="2800" dirty="0" err="1"/>
-              <a:t>ich</a:t>
-            </a:r>
-            <a:r>
-              <a:rPr lang="fr-FR" sz="2800" dirty="0"/>
+              <a:rPr lang="sk-SK" sz="2800" dirty="0" err="1">
+                <a:highlight>
+                  <a:srgbClr val="FFFF00"/>
+                </a:highlight>
+                <a:latin typeface="Consolas" panose="020B0609020204030204" pitchFamily="49" charset="0"/>
+              </a:rPr>
+              <a:t>class</a:t>
+            </a:r>
+            <a:r>
+              <a:rPr lang="sk-SK" sz="2800" dirty="0">
+                <a:highlight>
+                  <a:srgbClr val="FFFF00"/>
+                </a:highlight>
+                <a:latin typeface="Consolas" panose="020B0609020204030204" pitchFamily="49" charset="0"/>
+              </a:rPr>
               <a:t> </a:t>
             </a:r>
             <a:r>
-              <a:rPr lang="fr-FR" sz="2800" dirty="0" err="1"/>
-              <a:t>volať</a:t>
-            </a:r>
-            <a:r>
-              <a:rPr lang="fr-FR" sz="2800" dirty="0"/>
+              <a:rPr lang="sk-SK" sz="2800" dirty="0" err="1">
+                <a:highlight>
+                  <a:srgbClr val="FFFF00"/>
+                </a:highlight>
+                <a:latin typeface="Consolas" panose="020B0609020204030204" pitchFamily="49" charset="0"/>
+              </a:rPr>
+              <a:t>Main</a:t>
+            </a:r>
+            <a:r>
+              <a:rPr lang="sk-SK" sz="2800" dirty="0">
+                <a:highlight>
+                  <a:srgbClr val="FFFF00"/>
+                </a:highlight>
+                <a:latin typeface="Consolas" panose="020B0609020204030204" pitchFamily="49" charset="0"/>
+              </a:rPr>
+              <a:t> {</a:t>
+            </a:r>
+          </a:p>
+          <a:p>
+            <a:pPr marL="0" lvl="1" indent="0">
+              <a:lnSpc>
+                <a:spcPct val="100000"/>
+              </a:lnSpc>
+              <a:spcBef>
+                <a:spcPts val="0"/>
+              </a:spcBef>
+              <a:buNone/>
+            </a:pPr>
+            <a:r>
+              <a:rPr lang="sk-SK" sz="2800" dirty="0">
+                <a:highlight>
+                  <a:srgbClr val="FFFF00"/>
+                </a:highlight>
+                <a:latin typeface="Consolas" panose="020B0609020204030204" pitchFamily="49" charset="0"/>
+              </a:rPr>
+              <a:t>    </a:t>
+            </a:r>
+            <a:r>
+              <a:rPr lang="sk-SK" sz="2800" dirty="0" err="1">
+                <a:highlight>
+                  <a:srgbClr val="FFFF00"/>
+                </a:highlight>
+                <a:latin typeface="Consolas" panose="020B0609020204030204" pitchFamily="49" charset="0"/>
+              </a:rPr>
+              <a:t>public</a:t>
+            </a:r>
+            <a:r>
+              <a:rPr lang="sk-SK" sz="2800" dirty="0">
+                <a:highlight>
+                  <a:srgbClr val="FFFF00"/>
+                </a:highlight>
+                <a:latin typeface="Consolas" panose="020B0609020204030204" pitchFamily="49" charset="0"/>
+              </a:rPr>
               <a:t> </a:t>
             </a:r>
             <a:r>
-              <a:rPr lang="fr-FR" sz="2800" dirty="0" err="1"/>
-              <a:t>nezávisle</a:t>
-            </a:r>
-            <a:r>
-              <a:rPr lang="fr-FR" sz="2800" dirty="0"/>
-              <a:t> na </a:t>
-            </a:r>
-            <a:r>
-              <a:rPr lang="fr-FR" sz="2800" dirty="0" err="1"/>
-              <a:t>objekte</a:t>
-            </a:r>
-            <a:endParaRPr lang="sk-SK" sz="2800" dirty="0"/>
+              <a:rPr lang="sk-SK" sz="2800" dirty="0" err="1">
+                <a:highlight>
+                  <a:srgbClr val="FFFF00"/>
+                </a:highlight>
+                <a:latin typeface="Consolas" panose="020B0609020204030204" pitchFamily="49" charset="0"/>
+              </a:rPr>
+              <a:t>static</a:t>
+            </a:r>
+            <a:r>
+              <a:rPr lang="sk-SK" sz="2800" dirty="0">
+                <a:highlight>
+                  <a:srgbClr val="FFFF00"/>
+                </a:highlight>
+                <a:latin typeface="Consolas" panose="020B0609020204030204" pitchFamily="49" charset="0"/>
+              </a:rPr>
+              <a:t> </a:t>
+            </a:r>
+            <a:r>
+              <a:rPr lang="sk-SK" sz="2800" dirty="0" err="1">
+                <a:highlight>
+                  <a:srgbClr val="FFFF00"/>
+                </a:highlight>
+                <a:latin typeface="Consolas" panose="020B0609020204030204" pitchFamily="49" charset="0"/>
+              </a:rPr>
+              <a:t>void</a:t>
+            </a:r>
+            <a:r>
+              <a:rPr lang="sk-SK" sz="2800" dirty="0">
+                <a:highlight>
+                  <a:srgbClr val="FFFF00"/>
+                </a:highlight>
+                <a:latin typeface="Consolas" panose="020B0609020204030204" pitchFamily="49" charset="0"/>
+              </a:rPr>
+              <a:t> </a:t>
+            </a:r>
+            <a:r>
+              <a:rPr lang="sk-SK" sz="2800" dirty="0" err="1">
+                <a:highlight>
+                  <a:srgbClr val="FFFF00"/>
+                </a:highlight>
+                <a:latin typeface="Consolas" panose="020B0609020204030204" pitchFamily="49" charset="0"/>
+              </a:rPr>
+              <a:t>main</a:t>
+            </a:r>
+            <a:r>
+              <a:rPr lang="sk-SK" sz="2800" dirty="0">
+                <a:highlight>
+                  <a:srgbClr val="FFFF00"/>
+                </a:highlight>
+                <a:latin typeface="Consolas" panose="020B0609020204030204" pitchFamily="49" charset="0"/>
+              </a:rPr>
+              <a:t>(</a:t>
+            </a:r>
+            <a:r>
+              <a:rPr lang="sk-SK" sz="2800" dirty="0" err="1">
+                <a:highlight>
+                  <a:srgbClr val="FFFF00"/>
+                </a:highlight>
+                <a:latin typeface="Consolas" panose="020B0609020204030204" pitchFamily="49" charset="0"/>
+              </a:rPr>
+              <a:t>String</a:t>
+            </a:r>
+            <a:r>
+              <a:rPr lang="sk-SK" sz="2800" dirty="0">
+                <a:highlight>
+                  <a:srgbClr val="FFFF00"/>
+                </a:highlight>
+                <a:latin typeface="Consolas" panose="020B0609020204030204" pitchFamily="49" charset="0"/>
+              </a:rPr>
+              <a:t>[] </a:t>
+            </a:r>
+            <a:r>
+              <a:rPr lang="sk-SK" sz="2800" dirty="0" err="1">
+                <a:highlight>
+                  <a:srgbClr val="FFFF00"/>
+                </a:highlight>
+                <a:latin typeface="Consolas" panose="020B0609020204030204" pitchFamily="49" charset="0"/>
+              </a:rPr>
+              <a:t>args</a:t>
+            </a:r>
+            <a:r>
+              <a:rPr lang="sk-SK" sz="2800" dirty="0">
+                <a:highlight>
+                  <a:srgbClr val="FFFF00"/>
+                </a:highlight>
+                <a:latin typeface="Consolas" panose="020B0609020204030204" pitchFamily="49" charset="0"/>
+              </a:rPr>
+              <a:t>) {</a:t>
+            </a:r>
+          </a:p>
+          <a:p>
+            <a:pPr marL="0" lvl="1" indent="0">
+              <a:lnSpc>
+                <a:spcPct val="100000"/>
+              </a:lnSpc>
+              <a:spcBef>
+                <a:spcPts val="0"/>
+              </a:spcBef>
+              <a:buNone/>
+            </a:pPr>
+            <a:r>
+              <a:rPr lang="sk-SK" sz="2800" dirty="0">
+                <a:highlight>
+                  <a:srgbClr val="FFFF00"/>
+                </a:highlight>
+                <a:latin typeface="Consolas" panose="020B0609020204030204" pitchFamily="49" charset="0"/>
+              </a:rPr>
+              <a:t>        </a:t>
+            </a:r>
+            <a:r>
+              <a:rPr lang="sk-SK" sz="2800" dirty="0" err="1">
+                <a:highlight>
+                  <a:srgbClr val="FFFF00"/>
+                </a:highlight>
+                <a:latin typeface="Consolas" panose="020B0609020204030204" pitchFamily="49" charset="0"/>
+              </a:rPr>
+              <a:t>System.out.println</a:t>
+            </a:r>
+            <a:r>
+              <a:rPr lang="sk-SK" sz="2800" dirty="0">
+                <a:highlight>
+                  <a:srgbClr val="FFFF00"/>
+                </a:highlight>
+                <a:latin typeface="Consolas" panose="020B0609020204030204" pitchFamily="49" charset="0"/>
+              </a:rPr>
+              <a:t>("</a:t>
+            </a:r>
+            <a:r>
+              <a:rPr lang="sk-SK" sz="2800" dirty="0" err="1">
+                <a:highlight>
+                  <a:srgbClr val="FFFF00"/>
+                </a:highlight>
+                <a:latin typeface="Consolas" panose="020B0609020204030204" pitchFamily="49" charset="0"/>
+              </a:rPr>
+              <a:t>Hello</a:t>
+            </a:r>
+            <a:r>
+              <a:rPr lang="sk-SK" sz="2800" dirty="0">
+                <a:highlight>
+                  <a:srgbClr val="FFFF00"/>
+                </a:highlight>
+                <a:latin typeface="Consolas" panose="020B0609020204030204" pitchFamily="49" charset="0"/>
+              </a:rPr>
+              <a:t> </a:t>
+            </a:r>
+            <a:r>
+              <a:rPr lang="sk-SK" sz="2800" dirty="0" err="1">
+                <a:highlight>
+                  <a:srgbClr val="FFFF00"/>
+                </a:highlight>
+                <a:latin typeface="Consolas" panose="020B0609020204030204" pitchFamily="49" charset="0"/>
+              </a:rPr>
+              <a:t>world</a:t>
+            </a:r>
+            <a:r>
+              <a:rPr lang="sk-SK" sz="2800" dirty="0">
+                <a:highlight>
+                  <a:srgbClr val="FFFF00"/>
+                </a:highlight>
+                <a:latin typeface="Consolas" panose="020B0609020204030204" pitchFamily="49" charset="0"/>
+              </a:rPr>
+              <a:t>!");</a:t>
+            </a:r>
+          </a:p>
+          <a:p>
+            <a:pPr marL="0" lvl="1" indent="0">
+              <a:lnSpc>
+                <a:spcPct val="100000"/>
+              </a:lnSpc>
+              <a:spcBef>
+                <a:spcPts val="0"/>
+              </a:spcBef>
+              <a:buNone/>
+            </a:pPr>
+            <a:r>
+              <a:rPr lang="sk-SK" sz="2800" dirty="0">
+                <a:highlight>
+                  <a:srgbClr val="FFFF00"/>
+                </a:highlight>
+                <a:latin typeface="Consolas" panose="020B0609020204030204" pitchFamily="49" charset="0"/>
+              </a:rPr>
+              <a:t>    }</a:t>
+            </a:r>
+          </a:p>
+          <a:p>
+            <a:pPr marL="0" lvl="1" indent="0">
+              <a:lnSpc>
+                <a:spcPct val="100000"/>
+              </a:lnSpc>
+              <a:spcBef>
+                <a:spcPts val="0"/>
+              </a:spcBef>
+              <a:buNone/>
+            </a:pPr>
+            <a:r>
+              <a:rPr lang="sk-SK" sz="2800" dirty="0">
+                <a:highlight>
+                  <a:srgbClr val="FFFF00"/>
+                </a:highlight>
+                <a:latin typeface="Consolas" panose="020B0609020204030204" pitchFamily="49" charset="0"/>
+              </a:rPr>
+              <a:t>}</a:t>
+            </a:r>
           </a:p>
           <a:p>
             <a:pPr>
@@ -4632,7 +5249,7 @@
           <p:cNvPr id="5" name="Nadpis 4">
             <a:extLst>
               <a:ext uri="{FF2B5EF4-FFF2-40B4-BE49-F238E27FC236}">
-                <a16:creationId xmlns:a16="http://schemas.microsoft.com/office/drawing/2014/main" id="{0916E66A-BCC7-CD34-6629-ED8AD7BB94E1}"/>
+                <a16:creationId xmlns:a16="http://schemas.microsoft.com/office/drawing/2014/main" id="{1BD34ACD-671C-B494-A3B2-74F7B7D997F5}"/>
               </a:ext>
             </a:extLst>
           </p:cNvPr>
@@ -4655,7 +5272,7 @@
     </p:spTree>
     <p:extLst>
       <p:ext uri="{BB962C8B-B14F-4D97-AF65-F5344CB8AC3E}">
-        <p14:creationId xmlns:p14="http://schemas.microsoft.com/office/powerpoint/2010/main" val="704539849"/>
+        <p14:creationId xmlns:p14="http://schemas.microsoft.com/office/powerpoint/2010/main" val="1269213955"/>
       </p:ext>
     </p:extLst>
   </p:cSld>
@@ -4681,7 +5298,7 @@
         <p:cNvPr id="1" name="">
           <a:extLst>
             <a:ext uri="{FF2B5EF4-FFF2-40B4-BE49-F238E27FC236}">
-              <a16:creationId xmlns:a16="http://schemas.microsoft.com/office/drawing/2014/main" id="{4E9B7D7F-1465-F4D8-A5AA-8AE0E173294B}"/>
+              <a16:creationId xmlns:a16="http://schemas.microsoft.com/office/drawing/2014/main" id="{F85B952C-DEB0-F05A-6099-A8BDC351D532}"/>
             </a:ext>
           </a:extLst>
         </p:cNvPr>
@@ -4701,7 +5318,7 @@
           <p:cNvPr id="3" name="Zástupný objekt pre obsah 2">
             <a:extLst>
               <a:ext uri="{FF2B5EF4-FFF2-40B4-BE49-F238E27FC236}">
-                <a16:creationId xmlns:a16="http://schemas.microsoft.com/office/drawing/2014/main" id="{7AFA8CAF-912F-42AE-4E85-2A7A0F2B6997}"/>
+                <a16:creationId xmlns:a16="http://schemas.microsoft.com/office/drawing/2014/main" id="{EA1B4840-2877-41AB-3F4C-3F6D130D5034}"/>
               </a:ext>
             </a:extLst>
           </p:cNvPr>
@@ -4714,8 +5331,8 @@
         </p:nvSpPr>
         <p:spPr>
           <a:xfrm>
-            <a:off x="2068286" y="1845734"/>
-            <a:ext cx="9437913" cy="4217609"/>
+            <a:off x="1484671" y="1845734"/>
+            <a:ext cx="8649930" cy="4217609"/>
           </a:xfrm>
         </p:spPr>
         <p:txBody>
@@ -4731,13 +5348,82 @@
               <a:buNone/>
             </a:pPr>
             <a:r>
-              <a:rPr lang="sk-SK" sz="2800" dirty="0" err="1"/>
-              <a:t>Entry</a:t>
-            </a:r>
-            <a:r>
               <a:rPr lang="sk-SK" sz="2800" dirty="0"/>
-              <a:t> point programu</a:t>
-            </a:r>
+              <a:t>Funkcie v Jave sú vnútri tried a nazývajú sa metódy.</a:t>
+            </a:r>
+          </a:p>
+          <a:p>
+            <a:pPr marL="0" indent="0">
+              <a:spcBef>
+                <a:spcPts val="1200"/>
+              </a:spcBef>
+              <a:buNone/>
+            </a:pPr>
+            <a:r>
+              <a:rPr lang="sk-SK" dirty="0"/>
+              <a:t>Trieda je šablóna, alebo plán, podľa ktorého sa vytvárajú objekty. </a:t>
+            </a:r>
+          </a:p>
+          <a:p>
+            <a:pPr marL="0" indent="0">
+              <a:spcBef>
+                <a:spcPts val="1200"/>
+              </a:spcBef>
+              <a:buNone/>
+            </a:pPr>
+            <a:r>
+              <a:rPr lang="fr-FR" sz="2800" dirty="0" err="1">
+                <a:highlight>
+                  <a:srgbClr val="00FFFF"/>
+                </a:highlight>
+              </a:rPr>
+              <a:t>Statické</a:t>
+            </a:r>
+            <a:r>
+              <a:rPr lang="fr-FR" sz="2800" dirty="0">
+                <a:highlight>
+                  <a:srgbClr val="00FFFF"/>
+                </a:highlight>
+              </a:rPr>
+              <a:t> </a:t>
+            </a:r>
+            <a:r>
+              <a:rPr lang="fr-FR" sz="2800" dirty="0" err="1">
+                <a:highlight>
+                  <a:srgbClr val="00FFFF"/>
+                </a:highlight>
+              </a:rPr>
+              <a:t>metódy</a:t>
+            </a:r>
+            <a:r>
+              <a:rPr lang="fr-FR" sz="2800" dirty="0">
+                <a:highlight>
+                  <a:srgbClr val="00FFFF"/>
+                </a:highlight>
+              </a:rPr>
+              <a:t> - </a:t>
+            </a:r>
+            <a:r>
+              <a:rPr lang="fr-FR" dirty="0" err="1">
+                <a:solidFill>
+                  <a:srgbClr val="C00000"/>
+                </a:solidFill>
+                <a:highlight>
+                  <a:srgbClr val="FFFF00"/>
+                </a:highlight>
+                <a:latin typeface="Consolas" panose="020B0609020204030204" pitchFamily="49" charset="0"/>
+              </a:rPr>
+              <a:t>static</a:t>
+            </a:r>
+            <a:endParaRPr lang="fr-FR" dirty="0">
+              <a:solidFill>
+                <a:srgbClr val="C00000"/>
+              </a:solidFill>
+              <a:highlight>
+                <a:srgbClr val="FFFF00"/>
+              </a:highlight>
+              <a:latin typeface="Consolas" panose="020B0609020204030204" pitchFamily="49" charset="0"/>
+            </a:endParaRPr>
           </a:p>
           <a:p>
             <a:pPr lvl="1">
@@ -4746,63 +5432,50 @@
               </a:spcBef>
             </a:pPr>
             <a:r>
-              <a:rPr lang="sk-SK" sz="2800" dirty="0"/>
-              <a:t>statická metóda </a:t>
-            </a:r>
-            <a:r>
-              <a:rPr lang="sk-SK" sz="2800" dirty="0" err="1">
-                <a:highlight>
-                  <a:srgbClr val="FFFF00"/>
-                </a:highlight>
-                <a:latin typeface="Consolas" panose="020B0609020204030204" pitchFamily="49" charset="0"/>
-              </a:rPr>
-              <a:t>main</a:t>
+              <a:rPr lang="fr-FR" sz="2800" dirty="0" err="1">
+                <a:highlight>
+                  <a:srgbClr val="00FFFF"/>
+                </a:highlight>
+              </a:rPr>
+              <a:t>Patria</a:t>
+            </a:r>
+            <a:r>
+              <a:rPr lang="fr-FR" sz="2800" dirty="0">
+                <a:highlight>
+                  <a:srgbClr val="00FFFF"/>
+                </a:highlight>
+              </a:rPr>
+              <a:t> do </a:t>
             </a:r>
             <a:r>
               <a:rPr lang="sk-SK" sz="2800" dirty="0">
                 <a:highlight>
-                  <a:srgbClr val="FFFF00"/>
-                </a:highlight>
-                <a:latin typeface="Consolas" panose="020B0609020204030204" pitchFamily="49" charset="0"/>
-              </a:rPr>
-              <a:t>(</a:t>
-            </a:r>
-            <a:r>
-              <a:rPr lang="sk-SK" sz="2800" dirty="0" err="1">
-                <a:highlight>
-                  <a:srgbClr val="FFFF00"/>
-                </a:highlight>
-                <a:latin typeface="Consolas" panose="020B0609020204030204" pitchFamily="49" charset="0"/>
-              </a:rPr>
-              <a:t>String</a:t>
-            </a:r>
-            <a:r>
-              <a:rPr lang="sk-SK" sz="2800" dirty="0">
-                <a:highlight>
-                  <a:srgbClr val="FFFF00"/>
-                </a:highlight>
-                <a:latin typeface="Consolas" panose="020B0609020204030204" pitchFamily="49" charset="0"/>
-              </a:rPr>
-              <a:t>[] </a:t>
-            </a:r>
-            <a:r>
-              <a:rPr lang="sk-SK" sz="2800" dirty="0" err="1">
-                <a:highlight>
-                  <a:srgbClr val="FFFF00"/>
-                </a:highlight>
-                <a:latin typeface="Consolas" panose="020B0609020204030204" pitchFamily="49" charset="0"/>
-              </a:rPr>
-              <a:t>args</a:t>
-            </a:r>
-            <a:r>
-              <a:rPr lang="sk-SK" sz="2800" dirty="0">
-                <a:highlight>
-                  <a:srgbClr val="FFFF00"/>
-                </a:highlight>
-                <a:latin typeface="Consolas" panose="020B0609020204030204" pitchFamily="49" charset="0"/>
-              </a:rPr>
-              <a:t>)</a:t>
-            </a:r>
+                  <a:srgbClr val="00FFFF"/>
+                </a:highlight>
+              </a:rPr>
+              <a:t>konkrétnej</a:t>
+            </a:r>
+            <a:r>
+              <a:rPr lang="fr-FR" sz="2800" dirty="0">
+                <a:highlight>
+                  <a:srgbClr val="00FFFF"/>
+                </a:highlight>
+              </a:rPr>
+              <a:t> </a:t>
+            </a:r>
+            <a:r>
+              <a:rPr lang="fr-FR" sz="2800" dirty="0" err="1">
+                <a:highlight>
+                  <a:srgbClr val="00FFFF"/>
+                </a:highlight>
+              </a:rPr>
+              <a:t>triedy</a:t>
+            </a:r>
+            <a:endParaRPr lang="fr-FR" sz="2800" dirty="0">
+              <a:highlight>
+                <a:srgbClr val="00FFFF"/>
+              </a:highlight>
+            </a:endParaRPr>
           </a:p>
           <a:p>
             <a:pPr lvl="1">
@@ -4811,337 +5484,82 @@
               </a:spcBef>
             </a:pPr>
             <a:r>
-              <a:rPr lang="sk-SK" sz="2800" dirty="0"/>
-              <a:t>keď skončí </a:t>
-            </a:r>
-            <a:r>
-              <a:rPr lang="sk-SK" sz="2800" dirty="0" err="1">
-                <a:highlight>
-                  <a:srgbClr val="FFFF00"/>
-                </a:highlight>
-                <a:latin typeface="Consolas" panose="020B0609020204030204" pitchFamily="49" charset="0"/>
-              </a:rPr>
-              <a:t>main</a:t>
-            </a:r>
-            <a:r>
-              <a:rPr lang="sk-SK" sz="2800" dirty="0"/>
-              <a:t>, skončí sa aj program</a:t>
-            </a:r>
-          </a:p>
-          <a:p>
-            <a:pPr lvl="1">
-              <a:spcBef>
-                <a:spcPts val="1200"/>
-              </a:spcBef>
-            </a:pPr>
-            <a:endParaRPr lang="sk-SK" sz="2800" dirty="0"/>
-          </a:p>
-          <a:p>
-            <a:pPr marL="0" lvl="1" indent="0">
-              <a:lnSpc>
-                <a:spcPct val="100000"/>
-              </a:lnSpc>
-              <a:spcBef>
-                <a:spcPts val="0"/>
-              </a:spcBef>
-              <a:buNone/>
-            </a:pPr>
-            <a:r>
-              <a:rPr lang="sk-SK" sz="2800" dirty="0" err="1">
-                <a:highlight>
-                  <a:srgbClr val="FFFF00"/>
-                </a:highlight>
-                <a:latin typeface="Consolas" panose="020B0609020204030204" pitchFamily="49" charset="0"/>
-              </a:rPr>
-              <a:t>public</a:t>
-            </a:r>
-            <a:r>
-              <a:rPr lang="sk-SK" sz="2800" dirty="0">
-                <a:highlight>
-                  <a:srgbClr val="FFFF00"/>
-                </a:highlight>
-                <a:latin typeface="Consolas" panose="020B0609020204030204" pitchFamily="49" charset="0"/>
+              <a:rPr lang="fr-FR" sz="2800" dirty="0" err="1">
+                <a:highlight>
+                  <a:srgbClr val="00FFFF"/>
+                </a:highlight>
+              </a:rPr>
+              <a:t>Viem</a:t>
+            </a:r>
+            <a:r>
+              <a:rPr lang="fr-FR" sz="2800" dirty="0">
+                <a:highlight>
+                  <a:srgbClr val="00FFFF"/>
+                </a:highlight>
               </a:rPr>
               <a:t> </a:t>
             </a:r>
             <a:r>
-              <a:rPr lang="sk-SK" sz="2800" dirty="0" err="1">
-                <a:highlight>
-                  <a:srgbClr val="FFFF00"/>
-                </a:highlight>
-                <a:latin typeface="Consolas" panose="020B0609020204030204" pitchFamily="49" charset="0"/>
-              </a:rPr>
-              <a:t>class</a:t>
-            </a:r>
-            <a:r>
-              <a:rPr lang="sk-SK" sz="2800" dirty="0">
-                <a:highlight>
-                  <a:srgbClr val="FFFF00"/>
-                </a:highlight>
-                <a:latin typeface="Consolas" panose="020B0609020204030204" pitchFamily="49" charset="0"/>
+              <a:rPr lang="fr-FR" sz="2800" dirty="0" err="1">
+                <a:highlight>
+                  <a:srgbClr val="00FFFF"/>
+                </a:highlight>
+              </a:rPr>
+              <a:t>ich</a:t>
+            </a:r>
+            <a:r>
+              <a:rPr lang="fr-FR" sz="2800" dirty="0">
+                <a:highlight>
+                  <a:srgbClr val="00FFFF"/>
+                </a:highlight>
               </a:rPr>
               <a:t> </a:t>
             </a:r>
             <a:r>
-              <a:rPr lang="sk-SK" sz="2800" dirty="0" err="1">
-                <a:highlight>
-                  <a:srgbClr val="FFFF00"/>
-                </a:highlight>
-                <a:latin typeface="Consolas" panose="020B0609020204030204" pitchFamily="49" charset="0"/>
-              </a:rPr>
-              <a:t>Main</a:t>
-            </a:r>
-            <a:r>
-              <a:rPr lang="sk-SK" sz="2800" dirty="0">
-                <a:highlight>
-                  <a:srgbClr val="FFFF00"/>
-                </a:highlight>
-                <a:latin typeface="Consolas" panose="020B0609020204030204" pitchFamily="49" charset="0"/>
-              </a:rPr>
-              <a:t> {</a:t>
-            </a:r>
-          </a:p>
-          <a:p>
-            <a:pPr marL="0" lvl="1" indent="0">
-              <a:lnSpc>
-                <a:spcPct val="100000"/>
-              </a:lnSpc>
-              <a:spcBef>
-                <a:spcPts val="0"/>
-              </a:spcBef>
-              <a:buNone/>
-            </a:pPr>
-            <a:r>
-              <a:rPr lang="sk-SK" sz="2800" dirty="0">
-                <a:highlight>
-                  <a:srgbClr val="FFFF00"/>
-                </a:highlight>
-                <a:latin typeface="Consolas" panose="020B0609020204030204" pitchFamily="49" charset="0"/>
-              </a:rPr>
-              <a:t>    </a:t>
-            </a:r>
-            <a:r>
-              <a:rPr lang="sk-SK" sz="2800" dirty="0" err="1">
-                <a:highlight>
-                  <a:srgbClr val="FFFF00"/>
-                </a:highlight>
-                <a:latin typeface="Consolas" panose="020B0609020204030204" pitchFamily="49" charset="0"/>
-              </a:rPr>
-              <a:t>public</a:t>
-            </a:r>
-            <a:r>
-              <a:rPr lang="sk-SK" sz="2800" dirty="0">
-                <a:highlight>
-                  <a:srgbClr val="FFFF00"/>
-                </a:highlight>
-                <a:latin typeface="Consolas" panose="020B0609020204030204" pitchFamily="49" charset="0"/>
+              <a:rPr lang="fr-FR" sz="2800" dirty="0" err="1">
+                <a:highlight>
+                  <a:srgbClr val="00FFFF"/>
+                </a:highlight>
+              </a:rPr>
+              <a:t>volať</a:t>
+            </a:r>
+            <a:r>
+              <a:rPr lang="fr-FR" sz="2800" dirty="0">
+                <a:highlight>
+                  <a:srgbClr val="00FFFF"/>
+                </a:highlight>
               </a:rPr>
               <a:t> </a:t>
             </a:r>
             <a:r>
-              <a:rPr lang="sk-SK" sz="2800" dirty="0" err="1">
-                <a:highlight>
-                  <a:srgbClr val="FFFF00"/>
-                </a:highlight>
-                <a:latin typeface="Consolas" panose="020B0609020204030204" pitchFamily="49" charset="0"/>
-              </a:rPr>
-              <a:t>static</a:t>
-            </a:r>
-            <a:r>
-              <a:rPr lang="sk-SK" sz="2800" dirty="0">
-                <a:highlight>
-                  <a:srgbClr val="FFFF00"/>
-                </a:highlight>
-                <a:latin typeface="Consolas" panose="020B0609020204030204" pitchFamily="49" charset="0"/>
-              </a:rPr>
-              <a:t> </a:t>
-            </a:r>
-            <a:r>
-              <a:rPr lang="sk-SK" sz="2800" dirty="0" err="1">
-                <a:highlight>
-                  <a:srgbClr val="FFFF00"/>
-                </a:highlight>
-                <a:latin typeface="Consolas" panose="020B0609020204030204" pitchFamily="49" charset="0"/>
-              </a:rPr>
-              <a:t>void</a:t>
-            </a:r>
-            <a:r>
-              <a:rPr lang="sk-SK" sz="2800" dirty="0">
-                <a:highlight>
-                  <a:srgbClr val="FFFF00"/>
-                </a:highlight>
-                <a:latin typeface="Consolas" panose="020B0609020204030204" pitchFamily="49" charset="0"/>
-              </a:rPr>
-              <a:t> </a:t>
-            </a:r>
-            <a:r>
-              <a:rPr lang="sk-SK" sz="2800" dirty="0" err="1">
-                <a:highlight>
-                  <a:srgbClr val="FFFF00"/>
-                </a:highlight>
-                <a:latin typeface="Consolas" panose="020B0609020204030204" pitchFamily="49" charset="0"/>
-              </a:rPr>
-              <a:t>main</a:t>
-            </a:r>
-            <a:r>
-              <a:rPr lang="sk-SK" sz="2800" dirty="0">
-                <a:highlight>
-                  <a:srgbClr val="FFFF00"/>
-                </a:highlight>
-                <a:latin typeface="Consolas" panose="020B0609020204030204" pitchFamily="49" charset="0"/>
-              </a:rPr>
-              <a:t>(</a:t>
-            </a:r>
-            <a:r>
-              <a:rPr lang="sk-SK" sz="2800" dirty="0" err="1">
-                <a:highlight>
-                  <a:srgbClr val="FFFF00"/>
-                </a:highlight>
-                <a:latin typeface="Consolas" panose="020B0609020204030204" pitchFamily="49" charset="0"/>
-              </a:rPr>
-              <a:t>String</a:t>
-            </a:r>
-            <a:r>
-              <a:rPr lang="sk-SK" sz="2800" dirty="0">
-                <a:highlight>
-                  <a:srgbClr val="FFFF00"/>
-                </a:highlight>
-                <a:latin typeface="Consolas" panose="020B0609020204030204" pitchFamily="49" charset="0"/>
-              </a:rPr>
-              <a:t>[] </a:t>
-            </a:r>
-            <a:r>
-              <a:rPr lang="sk-SK" sz="2800" dirty="0" err="1">
-                <a:highlight>
-                  <a:srgbClr val="FFFF00"/>
-                </a:highlight>
-                <a:latin typeface="Consolas" panose="020B0609020204030204" pitchFamily="49" charset="0"/>
-              </a:rPr>
-              <a:t>args</a:t>
-            </a:r>
-            <a:r>
-              <a:rPr lang="sk-SK" sz="2800" dirty="0">
-                <a:highlight>
-                  <a:srgbClr val="FFFF00"/>
-                </a:highlight>
-                <a:latin typeface="Consolas" panose="020B0609020204030204" pitchFamily="49" charset="0"/>
-              </a:rPr>
-              <a:t>) {</a:t>
-            </a:r>
-          </a:p>
-          <a:p>
-            <a:pPr marL="0" lvl="1" indent="0">
-              <a:lnSpc>
-                <a:spcPct val="100000"/>
-              </a:lnSpc>
-              <a:spcBef>
-                <a:spcPts val="0"/>
-              </a:spcBef>
-              <a:buNone/>
-            </a:pPr>
-            <a:r>
-              <a:rPr lang="sk-SK" sz="2800" dirty="0">
-                <a:highlight>
-                  <a:srgbClr val="FFFF00"/>
-                </a:highlight>
-                <a:latin typeface="Consolas" panose="020B0609020204030204" pitchFamily="49" charset="0"/>
-              </a:rPr>
-              <a:t>        </a:t>
-            </a:r>
-            <a:r>
-              <a:rPr lang="sk-SK" sz="2800" dirty="0" err="1">
-                <a:highlight>
-                  <a:srgbClr val="FFFF00"/>
-                </a:highlight>
-                <a:latin typeface="Consolas" panose="020B0609020204030204" pitchFamily="49" charset="0"/>
-              </a:rPr>
-              <a:t>System.out.println</a:t>
-            </a:r>
-            <a:r>
-              <a:rPr lang="sk-SK" sz="2800" dirty="0">
-                <a:highlight>
-                  <a:srgbClr val="FFFF00"/>
-                </a:highlight>
-                <a:latin typeface="Consolas" panose="020B0609020204030204" pitchFamily="49" charset="0"/>
-              </a:rPr>
-              <a:t>("</a:t>
-            </a:r>
-            <a:r>
-              <a:rPr lang="sk-SK" sz="2800" dirty="0" err="1">
-                <a:highlight>
-                  <a:srgbClr val="FFFF00"/>
-                </a:highlight>
-                <a:latin typeface="Consolas" panose="020B0609020204030204" pitchFamily="49" charset="0"/>
-              </a:rPr>
-              <a:t>Hello</a:t>
-            </a:r>
-            <a:r>
-              <a:rPr lang="sk-SK" sz="2800" dirty="0">
-                <a:highlight>
-                  <a:srgbClr val="FFFF00"/>
-                </a:highlight>
-                <a:latin typeface="Consolas" panose="020B0609020204030204" pitchFamily="49" charset="0"/>
-              </a:rPr>
-              <a:t> </a:t>
-            </a:r>
-            <a:r>
-              <a:rPr lang="sk-SK" sz="2800" dirty="0" err="1">
-                <a:highlight>
-                  <a:srgbClr val="FFFF00"/>
-                </a:highlight>
-                <a:latin typeface="Consolas" panose="020B0609020204030204" pitchFamily="49" charset="0"/>
-              </a:rPr>
-              <a:t>world</a:t>
-            </a:r>
-            <a:r>
-              <a:rPr lang="sk-SK" sz="2800" dirty="0">
-                <a:highlight>
-                  <a:srgbClr val="FFFF00"/>
-                </a:highlight>
-                <a:latin typeface="Consolas" panose="020B0609020204030204" pitchFamily="49" charset="0"/>
-              </a:rPr>
-              <a:t>!");</a:t>
-            </a:r>
-          </a:p>
-          <a:p>
-            <a:pPr marL="0" lvl="1" indent="0">
-              <a:lnSpc>
-                <a:spcPct val="100000"/>
-              </a:lnSpc>
-              <a:spcBef>
-                <a:spcPts val="0"/>
-              </a:spcBef>
-              <a:buNone/>
-            </a:pPr>
-            <a:r>
-              <a:rPr lang="sk-SK" sz="2800" dirty="0">
-                <a:highlight>
-                  <a:srgbClr val="FFFF00"/>
-                </a:highlight>
-                <a:latin typeface="Consolas" panose="020B0609020204030204" pitchFamily="49" charset="0"/>
-              </a:rPr>
-              <a:t>    }</a:t>
-            </a:r>
-          </a:p>
-          <a:p>
-            <a:pPr marL="0" lvl="1" indent="0">
-              <a:lnSpc>
-                <a:spcPct val="100000"/>
-              </a:lnSpc>
-              <a:spcBef>
-                <a:spcPts val="0"/>
-              </a:spcBef>
-              <a:buNone/>
-            </a:pPr>
-            <a:r>
-              <a:rPr lang="sk-SK" sz="2800" dirty="0">
-                <a:highlight>
-                  <a:srgbClr val="FFFF00"/>
-                </a:highlight>
-                <a:latin typeface="Consolas" panose="020B0609020204030204" pitchFamily="49" charset="0"/>
-              </a:rPr>
-              <a:t>}</a:t>
-            </a:r>
+              <a:rPr lang="fr-FR" sz="2800" dirty="0" err="1">
+                <a:highlight>
+                  <a:srgbClr val="00FFFF"/>
+                </a:highlight>
+              </a:rPr>
+              <a:t>nezávisle</a:t>
+            </a:r>
+            <a:r>
+              <a:rPr lang="fr-FR" sz="2800" dirty="0">
+                <a:highlight>
+                  <a:srgbClr val="00FFFF"/>
+                </a:highlight>
+              </a:rPr>
+              <a:t> na </a:t>
+            </a:r>
+            <a:r>
+              <a:rPr lang="fr-FR" sz="2800" dirty="0" err="1">
+                <a:highlight>
+                  <a:srgbClr val="00FFFF"/>
+                </a:highlight>
+              </a:rPr>
+              <a:t>objekte</a:t>
+            </a:r>
+            <a:endParaRPr lang="sk-SK" sz="2800" dirty="0">
+              <a:highlight>
+                <a:srgbClr val="00FFFF"/>
+              </a:highlight>
+            </a:endParaRPr>
           </a:p>
           <a:p>
             <a:pPr>
@@ -5176,7 +5594,7 @@
           <p:cNvPr id="5" name="Nadpis 4">
             <a:extLst>
               <a:ext uri="{FF2B5EF4-FFF2-40B4-BE49-F238E27FC236}">
-                <a16:creationId xmlns:a16="http://schemas.microsoft.com/office/drawing/2014/main" id="{1BD34ACD-671C-B494-A3B2-74F7B7D997F5}"/>
+                <a16:creationId xmlns:a16="http://schemas.microsoft.com/office/drawing/2014/main" id="{0916E66A-BCC7-CD34-6629-ED8AD7BB94E1}"/>
               </a:ext>
             </a:extLst>
           </p:cNvPr>
@@ -5199,7 +5617,7 @@
     </p:spTree>
     <p:extLst>
       <p:ext uri="{BB962C8B-B14F-4D97-AF65-F5344CB8AC3E}">
-        <p14:creationId xmlns:p14="http://schemas.microsoft.com/office/powerpoint/2010/main" val="1269213955"/>
+        <p14:creationId xmlns:p14="http://schemas.microsoft.com/office/powerpoint/2010/main" val="704539849"/>
       </p:ext>
     </p:extLst>
   </p:cSld>
@@ -5286,11 +5704,18 @@
               </a:spcBef>
             </a:pPr>
             <a:r>
-              <a:rPr lang="sk-SK" sz="2800" dirty="0"/>
+              <a:rPr lang="sk-SK" sz="2800" dirty="0">
+                <a:highlight>
+                  <a:srgbClr val="00FFFF"/>
+                </a:highlight>
+              </a:rPr>
               <a:t>Metódy sú v triedach, každá trieda má svoj </a:t>
             </a:r>
             <a:r>
               <a:rPr lang="sk-SK" sz="2800" dirty="0">
+                <a:solidFill>
+                  <a:srgbClr val="C00000"/>
+                </a:solidFill>
                 <a:highlight>
                   <a:srgbClr val="FFFF00"/>
                 </a:highlight>
@@ -5300,6 +5725,9 @@
             </a:r>
             <a:r>
               <a:rPr lang="sk-SK" sz="2800" dirty="0" err="1">
+                <a:solidFill>
+                  <a:srgbClr val="C00000"/>
+                </a:solidFill>
                 <a:highlight>
                   <a:srgbClr val="FFFF00"/>
                 </a:highlight>
@@ -5308,8 +5736,31 @@
               <a:t>java</a:t>
             </a:r>
             <a:r>
-              <a:rPr lang="sk-SK" sz="2800" dirty="0"/>
-              <a:t> súbor s rovnakým názvom ako trieda</a:t>
+              <a:rPr lang="en-US" sz="2800" dirty="0">
+                <a:solidFill>
+                  <a:srgbClr val="C00000"/>
+                </a:solidFill>
+                <a:highlight>
+                  <a:srgbClr val="00FFFF"/>
+                </a:highlight>
+              </a:rPr>
+              <a:t> </a:t>
+            </a:r>
+            <a:r>
+              <a:rPr lang="en-US" sz="2800" dirty="0">
+                <a:highlight>
+                  <a:srgbClr val="00FFFF"/>
+                </a:highlight>
+              </a:rPr>
+              <a:t>s</a:t>
+            </a:r>
+            <a:r>
+              <a:rPr lang="sk-SK" sz="2800" dirty="0">
+                <a:highlight>
+                  <a:srgbClr val="00FFFF"/>
+                </a:highlight>
+              </a:rPr>
+              <a:t>úbor s rovnakým názvom ako trieda</a:t>
             </a:r>
           </a:p>
           <a:p>
@@ -5319,12 +5770,16 @@
               </a:spcBef>
             </a:pPr>
             <a:r>
-              <a:rPr lang="sk-SK" sz="2800" dirty="0"/>
+              <a:rPr lang="sk-SK" sz="2800" dirty="0">
+                <a:highlight>
+                  <a:srgbClr val="00FFFF"/>
+                </a:highlight>
+              </a:rPr>
               <a:t>Triedy sú v balíkoch, každý balík má svoj priečinok s rovnakým názvom ako balík</a:t>
             </a:r>
             <a:endParaRPr lang="sk-SK" sz="2800" dirty="0">
               <a:highlight>
-                <a:srgbClr val="FFFF00"/>
+                <a:srgbClr val="00FFFF"/>
               </a:highlight>
               <a:latin typeface="Consolas" panose="020B0609020204030204" pitchFamily="49" charset="0"/>
             </a:endParaRPr>
@@ -5418,8 +5873,8 @@
         </p:nvSpPr>
         <p:spPr>
           <a:xfrm>
-            <a:off x="2068286" y="1845734"/>
-            <a:ext cx="7815943" cy="4217609"/>
+            <a:off x="1061884" y="2022715"/>
+            <a:ext cx="10599173" cy="4217609"/>
           </a:xfrm>
         </p:spPr>
         <p:txBody>
@@ -5435,9 +5890,42 @@
               <a:buNone/>
             </a:pPr>
             <a:r>
-              <a:rPr lang="sk-SK" dirty="0"/>
+              <a:rPr lang="sk-SK" dirty="0">
+                <a:highlight>
+                  <a:srgbClr val="00FFFF"/>
+                </a:highlight>
+              </a:rPr>
               <a:t>Reťazce znakov</a:t>
             </a:r>
+            <a:r>
+              <a:rPr lang="en-US" dirty="0">
+                <a:highlight>
+                  <a:srgbClr val="00FFFF"/>
+                </a:highlight>
+              </a:rPr>
+              <a:t> –  </a:t>
+            </a:r>
+            <a:r>
+              <a:rPr lang="sk-SK" dirty="0" err="1">
+                <a:solidFill>
+                  <a:srgbClr val="C00000"/>
+                </a:solidFill>
+                <a:highlight>
+                  <a:srgbClr val="FFFF00"/>
+                </a:highlight>
+                <a:latin typeface="Consolas" panose="020B0609020204030204" pitchFamily="49" charset="0"/>
+              </a:rPr>
+              <a:t>String</a:t>
+            </a:r>
+            <a:endParaRPr lang="sk-SK" dirty="0">
+              <a:solidFill>
+                <a:srgbClr val="C00000"/>
+              </a:solidFill>
+              <a:highlight>
+                <a:srgbClr val="FFFF00"/>
+              </a:highlight>
+              <a:latin typeface="Consolas" panose="020B0609020204030204" pitchFamily="49" charset="0"/>
+            </a:endParaRPr>
           </a:p>
           <a:p>
             <a:pPr lvl="1">
@@ -5446,15 +5934,85 @@
               </a:spcBef>
             </a:pPr>
             <a:r>
+              <a:rPr lang="sk-SK" sz="2800" dirty="0">
+                <a:highlight>
+                  <a:srgbClr val="00FFFF"/>
+                </a:highlight>
+              </a:rPr>
+              <a:t>reťazec je nemeniteľný objekt</a:t>
+            </a:r>
+          </a:p>
+          <a:p>
+            <a:pPr marL="0" indent="0">
+              <a:spcBef>
+                <a:spcPts val="1200"/>
+              </a:spcBef>
+              <a:buNone/>
+            </a:pPr>
+            <a:endParaRPr lang="sk-SK" dirty="0">
+              <a:highlight>
+                <a:srgbClr val="00FFFF"/>
+              </a:highlight>
+            </a:endParaRPr>
+          </a:p>
+          <a:p>
+            <a:pPr marL="0" indent="0">
+              <a:spcBef>
+                <a:spcPts val="1200"/>
+              </a:spcBef>
+              <a:buNone/>
+            </a:pPr>
+            <a:r>
+              <a:rPr lang="sk-SK" dirty="0">
+                <a:highlight>
+                  <a:srgbClr val="00FFFF"/>
+                </a:highlight>
+              </a:rPr>
+              <a:t>Výstup na obrazovku </a:t>
+            </a:r>
+          </a:p>
+          <a:p>
+            <a:pPr lvl="1">
+              <a:spcBef>
+                <a:spcPts val="1200"/>
+              </a:spcBef>
+            </a:pPr>
+            <a:r>
+              <a:rPr lang="sk-SK" sz="2800" dirty="0">
+                <a:highlight>
+                  <a:srgbClr val="00FFFF"/>
+                </a:highlight>
+              </a:rPr>
+              <a:t>pomocou </a:t>
+            </a:r>
+            <a:r>
               <a:rPr lang="sk-SK" sz="2800" dirty="0" err="1">
-                <a:highlight>
-                  <a:srgbClr val="FFFF00"/>
-                </a:highlight>
-                <a:latin typeface="Consolas" panose="020B0609020204030204" pitchFamily="49" charset="0"/>
-              </a:rPr>
-              <a:t>String</a:t>
-            </a:r>
-            <a:endParaRPr lang="sk-SK" sz="2800" dirty="0">
+                <a:solidFill>
+                  <a:srgbClr val="C00000"/>
+                </a:solidFill>
+                <a:highlight>
+                  <a:srgbClr val="FFFF00"/>
+                </a:highlight>
+                <a:latin typeface="Consolas" panose="020B0609020204030204" pitchFamily="49" charset="0"/>
+              </a:rPr>
+              <a:t>System.out.println</a:t>
+            </a:r>
+            <a:r>
+              <a:rPr lang="sk-SK" sz="2800" dirty="0">
+                <a:solidFill>
+                  <a:srgbClr val="C00000"/>
+                </a:solidFill>
+                <a:highlight>
+                  <a:srgbClr val="FFFF00"/>
+                </a:highlight>
+                <a:latin typeface="Consolas" panose="020B0609020204030204" pitchFamily="49" charset="0"/>
+              </a:rPr>
+              <a:t>()</a:t>
+            </a:r>
+            <a:endParaRPr lang="en-US" sz="2800" dirty="0">
+              <a:solidFill>
+                <a:srgbClr val="C00000"/>
+              </a:solidFill>
               <a:highlight>
                 <a:srgbClr val="FFFF00"/>
               </a:highlight>
@@ -5468,8 +6026,136 @@
               </a:spcBef>
             </a:pPr>
             <a:r>
-              <a:rPr lang="sk-SK" sz="2800" dirty="0"/>
-              <a:t>reťazec je nemeniteľný objekt</a:t>
+              <a:rPr lang="sk-SK" sz="2800" dirty="0" err="1">
+                <a:solidFill>
+                  <a:srgbClr val="C00000"/>
+                </a:solidFill>
+                <a:highlight>
+                  <a:srgbClr val="FFFF00"/>
+                </a:highlight>
+                <a:latin typeface="Consolas" panose="020B0609020204030204" pitchFamily="49" charset="0"/>
+              </a:rPr>
+              <a:t>printf</a:t>
+            </a:r>
+            <a:r>
+              <a:rPr lang="sk-SK" sz="2800" dirty="0">
+                <a:solidFill>
+                  <a:srgbClr val="C00000"/>
+                </a:solidFill>
+                <a:highlight>
+                  <a:srgbClr val="FFFF00"/>
+                </a:highlight>
+                <a:latin typeface="Consolas" panose="020B0609020204030204" pitchFamily="49" charset="0"/>
+              </a:rPr>
+              <a:t>() </a:t>
+            </a:r>
+            <a:r>
+              <a:rPr lang="en-US" sz="2800" dirty="0">
+                <a:highlight>
+                  <a:srgbClr val="00FFFF"/>
+                </a:highlight>
+              </a:rPr>
+              <a:t>– </a:t>
+            </a:r>
+            <a:r>
+              <a:rPr lang="sk-SK" sz="2800" dirty="0">
+                <a:highlight>
+                  <a:srgbClr val="00FFFF"/>
+                </a:highlight>
+              </a:rPr>
+              <a:t>formátovanie pomocou značiek </a:t>
+            </a:r>
+            <a:r>
+              <a:rPr lang="en-US" sz="2800" dirty="0">
+                <a:solidFill>
+                  <a:srgbClr val="C00000"/>
+                </a:solidFill>
+                <a:highlight>
+                  <a:srgbClr val="FFFF00"/>
+                </a:highlight>
+                <a:latin typeface="Consolas" panose="020B0609020204030204" pitchFamily="49" charset="0"/>
+              </a:rPr>
+              <a:t>%d</a:t>
+            </a:r>
+            <a:r>
+              <a:rPr lang="en-US" sz="2800" dirty="0">
+                <a:highlight>
+                  <a:srgbClr val="00FFFF"/>
+                </a:highlight>
+              </a:rPr>
+              <a:t>, </a:t>
+            </a:r>
+            <a:r>
+              <a:rPr lang="en-US" sz="2800" dirty="0">
+                <a:solidFill>
+                  <a:srgbClr val="C00000"/>
+                </a:solidFill>
+                <a:highlight>
+                  <a:srgbClr val="FFFF00"/>
+                </a:highlight>
+                <a:latin typeface="Consolas" panose="020B0609020204030204" pitchFamily="49" charset="0"/>
+              </a:rPr>
+              <a:t>%s</a:t>
+            </a:r>
+            <a:r>
+              <a:rPr lang="en-US" sz="2800" dirty="0">
+                <a:highlight>
+                  <a:srgbClr val="00FFFF"/>
+                </a:highlight>
+              </a:rPr>
+              <a:t>, </a:t>
+            </a:r>
+            <a:r>
+              <a:rPr lang="en-US" sz="2800" dirty="0">
+                <a:solidFill>
+                  <a:srgbClr val="C00000"/>
+                </a:solidFill>
+                <a:highlight>
+                  <a:srgbClr val="FFFF00"/>
+                </a:highlight>
+                <a:latin typeface="Consolas" panose="020B0609020204030204" pitchFamily="49" charset="0"/>
+              </a:rPr>
+              <a:t>%f</a:t>
+            </a:r>
+            <a:r>
+              <a:rPr lang="en-US" sz="2800" dirty="0">
+                <a:highlight>
+                  <a:srgbClr val="00FFFF"/>
+                </a:highlight>
+              </a:rPr>
+              <a:t>, </a:t>
+            </a:r>
+            <a:r>
+              <a:rPr lang="en-US" sz="2800" dirty="0">
+                <a:solidFill>
+                  <a:srgbClr val="C00000"/>
+                </a:solidFill>
+                <a:highlight>
+                  <a:srgbClr val="FFFF00"/>
+                </a:highlight>
+                <a:latin typeface="Consolas" panose="020B0609020204030204" pitchFamily="49" charset="0"/>
+              </a:rPr>
+              <a:t>%c</a:t>
+            </a:r>
+            <a:r>
+              <a:rPr lang="en-US" sz="2800" dirty="0">
+                <a:highlight>
+                  <a:srgbClr val="00FFFF"/>
+                </a:highlight>
+              </a:rPr>
+              <a:t>, …</a:t>
+            </a:r>
+            <a:r>
+              <a:rPr lang="sk-SK" sz="2800" dirty="0">
+                <a:solidFill>
+                  <a:srgbClr val="FF0000"/>
+                </a:solidFill>
+                <a:highlight>
+                  <a:srgbClr val="FFFF00"/>
+                </a:highlight>
+                <a:latin typeface="Consolas" panose="020B0609020204030204" pitchFamily="49" charset="0"/>
+              </a:rPr>
+              <a:t> </a:t>
             </a:r>
           </a:p>
           <a:p>
@@ -5479,18 +6165,13 @@
               </a:spcBef>
               <a:buNone/>
             </a:pPr>
-            <a:endParaRPr lang="sk-SK" dirty="0"/>
-          </a:p>
-          <a:p>
-            <a:pPr marL="0" indent="0">
-              <a:spcBef>
-                <a:spcPts val="1200"/>
-              </a:spcBef>
-              <a:buNone/>
-            </a:pPr>
-            <a:r>
-              <a:rPr lang="sk-SK" dirty="0"/>
-              <a:t>Výstup na obrazovku </a:t>
+            <a:r>
+              <a:rPr lang="sk-SK" dirty="0">
+                <a:highlight>
+                  <a:srgbClr val="00FFFF"/>
+                </a:highlight>
+              </a:rPr>
+              <a:t>Vstup z klávesnice </a:t>
             </a:r>
           </a:p>
           <a:p>
@@ -5500,52 +6181,18 @@
               </a:spcBef>
             </a:pPr>
             <a:r>
-              <a:rPr lang="sk-SK" sz="2800" dirty="0"/>
+              <a:rPr lang="sk-SK" sz="2800" dirty="0">
+                <a:highlight>
+                  <a:srgbClr val="00FFFF"/>
+                </a:highlight>
+              </a:rPr>
               <a:t>pomocou </a:t>
             </a:r>
             <a:r>
               <a:rPr lang="sk-SK" sz="2800" dirty="0" err="1">
-                <a:highlight>
-                  <a:srgbClr val="FFFF00"/>
-                </a:highlight>
-                <a:latin typeface="Consolas" panose="020B0609020204030204" pitchFamily="49" charset="0"/>
-              </a:rPr>
-              <a:t>System.out.println</a:t>
-            </a:r>
-            <a:r>
-              <a:rPr lang="sk-SK" sz="2800" dirty="0">
-                <a:highlight>
-                  <a:srgbClr val="FFFF00"/>
-                </a:highlight>
-                <a:latin typeface="Consolas" panose="020B0609020204030204" pitchFamily="49" charset="0"/>
-              </a:rPr>
-              <a:t>()</a:t>
-            </a:r>
-          </a:p>
-          <a:p>
-            <a:pPr marL="0" indent="0">
-              <a:spcBef>
-                <a:spcPts val="1200"/>
-              </a:spcBef>
-              <a:buNone/>
-            </a:pPr>
-            <a:r>
-              <a:rPr lang="sk-SK" dirty="0"/>
-              <a:t>Vstup z klávesnice </a:t>
-            </a:r>
-          </a:p>
-          <a:p>
-            <a:pPr lvl="1">
-              <a:spcBef>
-                <a:spcPts val="1200"/>
-              </a:spcBef>
-            </a:pPr>
-            <a:r>
-              <a:rPr lang="sk-SK" sz="2800" dirty="0"/>
-              <a:t>pomocou </a:t>
-            </a:r>
-            <a:r>
-              <a:rPr lang="sk-SK" sz="2800" dirty="0" err="1">
+                <a:solidFill>
+                  <a:srgbClr val="C00000"/>
+                </a:solidFill>
                 <a:highlight>
                   <a:srgbClr val="FFFF00"/>
                 </a:highlight>
@@ -5554,6 +6201,9 @@
               <a:t>java.util.Scanner</a:t>
             </a:r>
             <a:endParaRPr lang="sk-SK" sz="2800" dirty="0">
+              <a:solidFill>
+                <a:srgbClr val="C00000"/>
+              </a:solidFill>
               <a:highlight>
                 <a:srgbClr val="FFFF00"/>
               </a:highlight>
@@ -5601,6 +6251,183 @@
 </file>
 
 <file path=ppt/slides/slide7.xml><?xml version="1.0" encoding="utf-8"?>
+<p:sld xmlns:a="http://schemas.openxmlformats.org/drawingml/2006/main" xmlns:r="http://schemas.openxmlformats.org/officeDocument/2006/relationships" xmlns:p="http://schemas.openxmlformats.org/presentationml/2006/main">
+  <p:cSld>
+    <p:spTree>
+      <p:nvGrpSpPr>
+        <p:cNvPr id="1" name=""/>
+        <p:cNvGrpSpPr/>
+        <p:nvPr/>
+      </p:nvGrpSpPr>
+      <p:grpSpPr>
+        <a:xfrm>
+          <a:off x="0" y="0"/>
+          <a:ext cx="0" cy="0"/>
+          <a:chOff x="0" y="0"/>
+          <a:chExt cx="0" cy="0"/>
+        </a:xfrm>
+      </p:grpSpPr>
+      <p:sp>
+        <p:nvSpPr>
+          <p:cNvPr id="2" name="Nadpis 1">
+            <a:extLst>
+              <a:ext uri="{FF2B5EF4-FFF2-40B4-BE49-F238E27FC236}">
+                <a16:creationId xmlns:a16="http://schemas.microsoft.com/office/drawing/2014/main" id="{21A3D94F-5789-505C-095E-07A1B0DE6915}"/>
+              </a:ext>
+            </a:extLst>
+          </p:cNvPr>
+          <p:cNvSpPr>
+            <a:spLocks noGrp="1"/>
+          </p:cNvSpPr>
+          <p:nvPr>
+            <p:ph type="title"/>
+          </p:nvPr>
+        </p:nvSpPr>
+        <p:spPr/>
+        <p:txBody>
+          <a:bodyPr/>
+          <a:lstStyle/>
+          <a:p>
+            <a:endParaRPr lang="sk-SK"/>
+          </a:p>
+        </p:txBody>
+      </p:sp>
+      <p:sp>
+        <p:nvSpPr>
+          <p:cNvPr id="3" name="Zástupný objekt pre obsah 2">
+            <a:extLst>
+              <a:ext uri="{FF2B5EF4-FFF2-40B4-BE49-F238E27FC236}">
+                <a16:creationId xmlns:a16="http://schemas.microsoft.com/office/drawing/2014/main" id="{29EC6EDE-2BF4-EF6D-6FBC-C29902AF37EA}"/>
+              </a:ext>
+            </a:extLst>
+          </p:cNvPr>
+          <p:cNvSpPr>
+            <a:spLocks noGrp="1"/>
+          </p:cNvSpPr>
+          <p:nvPr>
+            <p:ph idx="1"/>
+          </p:nvPr>
+        </p:nvSpPr>
+        <p:spPr/>
+        <p:txBody>
+          <a:bodyPr/>
+          <a:lstStyle/>
+          <a:p>
+            <a:r>
+              <a:rPr lang="en-US" dirty="0" err="1">
+                <a:highlight>
+                  <a:srgbClr val="00FFFF"/>
+                </a:highlight>
+              </a:rPr>
+              <a:t>Podmienky</a:t>
+            </a:r>
+            <a:r>
+              <a:rPr lang="en-US" dirty="0">
+                <a:highlight>
+                  <a:srgbClr val="00FFFF"/>
+                </a:highlight>
+              </a:rPr>
+              <a:t> – </a:t>
+            </a:r>
+            <a:r>
+              <a:rPr lang="en-US" dirty="0">
+                <a:solidFill>
+                  <a:srgbClr val="C00000"/>
+                </a:solidFill>
+                <a:highlight>
+                  <a:srgbClr val="FFFF00"/>
+                </a:highlight>
+                <a:latin typeface="Consolas" panose="020B0609020204030204" pitchFamily="49" charset="0"/>
+              </a:rPr>
+              <a:t>if</a:t>
+            </a:r>
+            <a:r>
+              <a:rPr lang="en-US" dirty="0">
+                <a:highlight>
+                  <a:srgbClr val="00FFFF"/>
+                </a:highlight>
+              </a:rPr>
+              <a:t>, </a:t>
+            </a:r>
+            <a:r>
+              <a:rPr lang="en-US" dirty="0">
+                <a:solidFill>
+                  <a:srgbClr val="C00000"/>
+                </a:solidFill>
+                <a:highlight>
+                  <a:srgbClr val="FFFF00"/>
+                </a:highlight>
+                <a:latin typeface="Consolas" panose="020B0609020204030204" pitchFamily="49" charset="0"/>
+              </a:rPr>
+              <a:t>else</a:t>
+            </a:r>
+          </a:p>
+          <a:p>
+            <a:r>
+              <a:rPr lang="en-US" dirty="0" err="1">
+                <a:highlight>
+                  <a:srgbClr val="00FFFF"/>
+                </a:highlight>
+              </a:rPr>
+              <a:t>Cykly</a:t>
+            </a:r>
+            <a:r>
+              <a:rPr lang="en-US" dirty="0">
+                <a:highlight>
+                  <a:srgbClr val="00FFFF"/>
+                </a:highlight>
+              </a:rPr>
+              <a:t> – </a:t>
+            </a:r>
+            <a:r>
+              <a:rPr lang="en-US" dirty="0">
+                <a:solidFill>
+                  <a:srgbClr val="C00000"/>
+                </a:solidFill>
+                <a:highlight>
+                  <a:srgbClr val="FFFF00"/>
+                </a:highlight>
+                <a:latin typeface="Consolas" panose="020B0609020204030204" pitchFamily="49" charset="0"/>
+              </a:rPr>
+              <a:t>for</a:t>
+            </a:r>
+            <a:r>
+              <a:rPr lang="en-US" dirty="0">
+                <a:highlight>
+                  <a:srgbClr val="00FFFF"/>
+                </a:highlight>
+              </a:rPr>
+              <a:t>, </a:t>
+            </a:r>
+            <a:r>
+              <a:rPr lang="en-US" dirty="0">
+                <a:solidFill>
+                  <a:srgbClr val="C00000"/>
+                </a:solidFill>
+                <a:highlight>
+                  <a:srgbClr val="FFFF00"/>
+                </a:highlight>
+                <a:latin typeface="Consolas" panose="020B0609020204030204" pitchFamily="49" charset="0"/>
+              </a:rPr>
+              <a:t>while</a:t>
+            </a:r>
+          </a:p>
+        </p:txBody>
+      </p:sp>
+    </p:spTree>
+    <p:extLst>
+      <p:ext uri="{BB962C8B-B14F-4D97-AF65-F5344CB8AC3E}">
+        <p14:creationId xmlns:p14="http://schemas.microsoft.com/office/powerpoint/2010/main" val="1757874607"/>
+      </p:ext>
+    </p:extLst>
+  </p:cSld>
+  <p:clrMapOvr>
+    <a:masterClrMapping/>
+  </p:clrMapOvr>
+</p:sld>
+</file>
+
+<file path=ppt/slides/slide8.xml><?xml version="1.0" encoding="utf-8"?>
 <p:sld xmlns:a="http://schemas.openxmlformats.org/drawingml/2006/main" xmlns:r="http://schemas.openxmlformats.org/officeDocument/2006/relationships" xmlns:p="http://schemas.openxmlformats.org/presentationml/2006/main">
   <p:cSld>
     <p:bg>
@@ -6178,7 +7005,7 @@
 </p:sld>
 </file>
 
-<file path=ppt/slides/slide8.xml><?xml version="1.0" encoding="utf-8"?>
+<file path=ppt/slides/slide9.xml><?xml version="1.0" encoding="utf-8"?>
 <p:sld xmlns:a="http://schemas.openxmlformats.org/drawingml/2006/main" xmlns:r="http://schemas.openxmlformats.org/officeDocument/2006/relationships" xmlns:p="http://schemas.openxmlformats.org/presentationml/2006/main">
   <p:cSld>
     <p:bg>
@@ -6428,273 +7255,6 @@
     <p:extLst>
       <p:ext uri="{BB962C8B-B14F-4D97-AF65-F5344CB8AC3E}">
         <p14:creationId xmlns:p14="http://schemas.microsoft.com/office/powerpoint/2010/main" val="2326873376"/>
-      </p:ext>
-    </p:extLst>
-  </p:cSld>
-  <p:clrMapOvr>
-    <a:masterClrMapping/>
-  </p:clrMapOvr>
-</p:sld>
-</file>
-
-<file path=ppt/slides/slide9.xml><?xml version="1.0" encoding="utf-8"?>
-<p:sld xmlns:a="http://schemas.openxmlformats.org/drawingml/2006/main" xmlns:r="http://schemas.openxmlformats.org/officeDocument/2006/relationships" xmlns:p="http://schemas.openxmlformats.org/presentationml/2006/main">
-  <p:cSld>
-    <p:bg>
-      <p:bgPr>
-        <a:solidFill>
-          <a:schemeClr val="bg1"/>
-        </a:solidFill>
-        <a:effectLst/>
-      </p:bgPr>
-    </p:bg>
-    <p:spTree>
-      <p:nvGrpSpPr>
-        <p:cNvPr id="1" name="">
-          <a:extLst>
-            <a:ext uri="{FF2B5EF4-FFF2-40B4-BE49-F238E27FC236}">
-              <a16:creationId xmlns:a16="http://schemas.microsoft.com/office/drawing/2014/main" id="{14C3C45A-404A-F8E1-90CA-F992F3FFD7A2}"/>
-            </a:ext>
-          </a:extLst>
-        </p:cNvPr>
-        <p:cNvGrpSpPr/>
-        <p:nvPr/>
-      </p:nvGrpSpPr>
-      <p:grpSpPr>
-        <a:xfrm>
-          <a:off x="0" y="0"/>
-          <a:ext cx="0" cy="0"/>
-          <a:chOff x="0" y="0"/>
-          <a:chExt cx="0" cy="0"/>
-        </a:xfrm>
-      </p:grpSpPr>
-      <p:sp>
-        <p:nvSpPr>
-          <p:cNvPr id="3" name="Zástupný objekt pre obsah 2">
-            <a:extLst>
-              <a:ext uri="{FF2B5EF4-FFF2-40B4-BE49-F238E27FC236}">
-                <a16:creationId xmlns:a16="http://schemas.microsoft.com/office/drawing/2014/main" id="{03CB0AB9-7055-65C9-8673-2397DE68E9A3}"/>
-              </a:ext>
-            </a:extLst>
-          </p:cNvPr>
-          <p:cNvSpPr>
-            <a:spLocks noGrp="1"/>
-          </p:cNvSpPr>
-          <p:nvPr>
-            <p:ph idx="1"/>
-          </p:nvPr>
-        </p:nvSpPr>
-        <p:spPr>
-          <a:xfrm>
-            <a:off x="1502228" y="1573591"/>
-            <a:ext cx="9851572" cy="4217609"/>
-          </a:xfrm>
-        </p:spPr>
-        <p:txBody>
-          <a:bodyPr>
-            <a:noAutofit/>
-          </a:bodyPr>
-          <a:lstStyle/>
-          <a:p>
-            <a:pPr marL="0" indent="0">
-              <a:spcBef>
-                <a:spcPts val="1200"/>
-              </a:spcBef>
-              <a:buNone/>
-            </a:pPr>
-            <a:r>
-              <a:rPr lang="sk-SK" dirty="0"/>
-              <a:t>Cyklus </a:t>
-            </a:r>
-            <a:r>
-              <a:rPr lang="sk-SK" dirty="0" err="1">
-                <a:highlight>
-                  <a:srgbClr val="FFFF00"/>
-                </a:highlight>
-                <a:latin typeface="Consolas" panose="020B0609020204030204" pitchFamily="49" charset="0"/>
-              </a:rPr>
-              <a:t>for</a:t>
-            </a:r>
-            <a:r>
-              <a:rPr lang="sk-SK" dirty="0"/>
-              <a:t> sa používa, keď dopredu vieme, koľkokrát sa má cyklus opakovať</a:t>
-            </a:r>
-          </a:p>
-          <a:p>
-            <a:pPr marL="0" indent="0">
-              <a:spcBef>
-                <a:spcPts val="1200"/>
-              </a:spcBef>
-              <a:buNone/>
-            </a:pPr>
-            <a:endParaRPr lang="en-US" dirty="0"/>
-          </a:p>
-          <a:p>
-            <a:pPr marL="0" indent="0">
-              <a:spcBef>
-                <a:spcPts val="0"/>
-              </a:spcBef>
-              <a:buNone/>
-            </a:pPr>
-            <a:r>
-              <a:rPr lang="sk-SK" dirty="0" err="1">
-                <a:highlight>
-                  <a:srgbClr val="FFFF00"/>
-                </a:highlight>
-                <a:latin typeface="Consolas" panose="020B0609020204030204" pitchFamily="49" charset="0"/>
-              </a:rPr>
-              <a:t>for</a:t>
-            </a:r>
-            <a:r>
-              <a:rPr lang="sk-SK" dirty="0">
-                <a:highlight>
-                  <a:srgbClr val="FFFF00"/>
-                </a:highlight>
-                <a:latin typeface="Consolas" panose="020B0609020204030204" pitchFamily="49" charset="0"/>
-              </a:rPr>
-              <a:t> (inicializácia; podmienka; aktualizácia) {</a:t>
-            </a:r>
-          </a:p>
-          <a:p>
-            <a:pPr marL="0" indent="0">
-              <a:spcBef>
-                <a:spcPts val="0"/>
-              </a:spcBef>
-              <a:buNone/>
-            </a:pPr>
-            <a:r>
-              <a:rPr lang="sk-SK" dirty="0">
-                <a:highlight>
-                  <a:srgbClr val="FFFF00"/>
-                </a:highlight>
-                <a:latin typeface="Consolas" panose="020B0609020204030204" pitchFamily="49" charset="0"/>
-              </a:rPr>
-              <a:t>    // telo cyklu - kód, ktorý sa opakuje</a:t>
-            </a:r>
-          </a:p>
-          <a:p>
-            <a:pPr marL="0" indent="0">
-              <a:spcBef>
-                <a:spcPts val="0"/>
-              </a:spcBef>
-              <a:buNone/>
-            </a:pPr>
-            <a:r>
-              <a:rPr lang="sk-SK" dirty="0">
-                <a:highlight>
-                  <a:srgbClr val="FFFF00"/>
-                </a:highlight>
-                <a:latin typeface="Consolas" panose="020B0609020204030204" pitchFamily="49" charset="0"/>
-              </a:rPr>
-              <a:t>}</a:t>
-            </a:r>
-            <a:endParaRPr lang="en-US" dirty="0">
-              <a:highlight>
-                <a:srgbClr val="FFFF00"/>
-              </a:highlight>
-              <a:latin typeface="Consolas" panose="020B0609020204030204" pitchFamily="49" charset="0"/>
-            </a:endParaRPr>
-          </a:p>
-          <a:p>
-            <a:pPr marL="0" indent="0">
-              <a:spcBef>
-                <a:spcPts val="1200"/>
-              </a:spcBef>
-              <a:buNone/>
-            </a:pPr>
-            <a:endParaRPr lang="sk-SK" dirty="0"/>
-          </a:p>
-          <a:p>
-            <a:pPr marL="0" indent="0">
-              <a:spcBef>
-                <a:spcPts val="0"/>
-              </a:spcBef>
-              <a:buNone/>
-            </a:pPr>
-            <a:r>
-              <a:rPr lang="nn-NO" dirty="0">
-                <a:highlight>
-                  <a:srgbClr val="FFFF00"/>
-                </a:highlight>
-                <a:latin typeface="Consolas" panose="020B0609020204030204" pitchFamily="49" charset="0"/>
-              </a:rPr>
-              <a:t>for (int i = 0; i &lt; 5; i++) {</a:t>
-            </a:r>
-          </a:p>
-          <a:p>
-            <a:pPr marL="0" indent="0">
-              <a:spcBef>
-                <a:spcPts val="0"/>
-              </a:spcBef>
-              <a:buNone/>
-            </a:pPr>
-            <a:r>
-              <a:rPr lang="nn-NO" dirty="0">
-                <a:highlight>
-                  <a:srgbClr val="FFFF00"/>
-                </a:highlight>
-                <a:latin typeface="Consolas" panose="020B0609020204030204" pitchFamily="49" charset="0"/>
-              </a:rPr>
-              <a:t>    System.out.println("i = " + i);</a:t>
-            </a:r>
-          </a:p>
-          <a:p>
-            <a:pPr marL="0" indent="0">
-              <a:spcBef>
-                <a:spcPts val="0"/>
-              </a:spcBef>
-              <a:buNone/>
-            </a:pPr>
-            <a:r>
-              <a:rPr lang="nn-NO" dirty="0">
-                <a:highlight>
-                  <a:srgbClr val="FFFF00"/>
-                </a:highlight>
-                <a:latin typeface="Consolas" panose="020B0609020204030204" pitchFamily="49" charset="0"/>
-              </a:rPr>
-              <a:t>}</a:t>
-            </a:r>
-            <a:endParaRPr lang="sk-SK" dirty="0">
-              <a:highlight>
-                <a:srgbClr val="FFFF00"/>
-              </a:highlight>
-              <a:latin typeface="Consolas" panose="020B0609020204030204" pitchFamily="49" charset="0"/>
-            </a:endParaRPr>
-          </a:p>
-        </p:txBody>
-      </p:sp>
-      <p:sp>
-        <p:nvSpPr>
-          <p:cNvPr id="5" name="Nadpis 4">
-            <a:extLst>
-              <a:ext uri="{FF2B5EF4-FFF2-40B4-BE49-F238E27FC236}">
-                <a16:creationId xmlns:a16="http://schemas.microsoft.com/office/drawing/2014/main" id="{F1344CA6-2CA1-9017-D393-77EAA0BEB0F2}"/>
-              </a:ext>
-            </a:extLst>
-          </p:cNvPr>
-          <p:cNvSpPr>
-            <a:spLocks noGrp="1"/>
-          </p:cNvSpPr>
-          <p:nvPr>
-            <p:ph type="title"/>
-          </p:nvPr>
-        </p:nvSpPr>
-        <p:spPr/>
-        <p:txBody>
-          <a:bodyPr/>
-          <a:lstStyle/>
-          <a:p>
-            <a:r>
-              <a:rPr lang="sk-SK" dirty="0"/>
-              <a:t>Cyklus</a:t>
-            </a:r>
-          </a:p>
-        </p:txBody>
-      </p:sp>
-    </p:spTree>
-    <p:extLst>
-      <p:ext uri="{BB962C8B-B14F-4D97-AF65-F5344CB8AC3E}">
-        <p14:creationId xmlns:p14="http://schemas.microsoft.com/office/powerpoint/2010/main" val="3150143659"/>
       </p:ext>
     </p:extLst>
   </p:cSld>
